--- a/presentation/Fire_Detection_DeepLearning.pptx
+++ b/presentation/Fire_Detection_DeepLearning.pptx
@@ -4,6 +4,9 @@
   <p:sldMasterIdLst>
     <p:sldMasterId id="2147483648" r:id="rId1"/>
   </p:sldMasterIdLst>
+  <p:notesMasterIdLst>
+    <p:notesMasterId r:id="rId10"/>
+  </p:notesMasterIdLst>
   <p:sldIdLst>
     <p:sldId id="256" r:id="rId2"/>
     <p:sldId id="257" r:id="rId3"/>
@@ -14,10 +17,7 @@
     <p:sldId id="262" r:id="rId8"/>
     <p:sldId id="263" r:id="rId9"/>
   </p:sldIdLst>
-  <p:notesMasterIdLst>
-    <p:notesMasterId r:id="rId10"/>
-  </p:notesMasterIdLst>
-  <p:sldSz cx="9144000" cy="5143500"/>
+  <p:sldSz cx="9144000" cy="5143500" type="screen16x9"/>
   <p:notesSz cx="5143500" cy="9144000"/>
   <p:defaultTextStyle>
     <a:lvl1pPr marL="0" algn="l" defTabSz="914400" rtl="0" eaLnBrk="1" latinLnBrk="0" hangingPunct="1">
@@ -111,6 +111,11 @@
       </a:defRPr>
     </a:lvl9pPr>
   </p:defaultTextStyle>
+  <p:extLst>
+    <p:ext uri="{EFAFB233-063F-42B5-8137-9DF3F51BA10A}">
+      <p15:sldGuideLst xmlns:p15="http://schemas.microsoft.com/office/powerpoint/2012/main"/>
+    </p:ext>
+  </p:extLst>
 </p:presentation>
 </file>
 
@@ -136,234 +141,10 @@
           <a:chExt cx="0" cy="0"/>
         </a:xfrm>
       </p:grpSpPr>
-      <p:sp>
-        <p:nvSpPr>
-          <p:cNvPr id="2" name="Header Placeholder 1"/>
-          <p:cNvSpPr>
-            <a:spLocks noGrp="1"/>
-          </p:cNvSpPr>
-          <p:nvPr>
-            <p:ph type="hdr" sz="quarter"/>
-          </p:nvPr>
-        </p:nvSpPr>
-        <p:spPr>
-          <a:xfrm>
-            <a:off x="0" y="0"/>
-            <a:ext cx="2971800" cy="458788"/>
-          </a:xfrm>
-          <a:prstGeom prst="rect">
-            <a:avLst/>
-          </a:prstGeom>
-        </p:spPr>
-        <p:txBody>
-          <a:bodyPr vert="horz" lIns="91440" tIns="45720" rIns="91440" bIns="45720" rtlCol="0"/>
-          <a:lstStyle>
-            <a:lvl1pPr algn="l">
-              <a:defRPr sz="1200"/>
-            </a:lvl1pPr>
-          </a:lstStyle>
-          <a:p>
-            <a:endParaRPr lang="en-US"/>
-          </a:p>
-        </p:txBody>
-      </p:sp>
-      <p:sp>
-        <p:nvSpPr>
-          <p:cNvPr id="3" name="Date Placeholder 2"/>
-          <p:cNvSpPr>
-            <a:spLocks noGrp="1"/>
-          </p:cNvSpPr>
-          <p:nvPr>
-            <p:ph type="dt" idx="1"/>
-          </p:nvPr>
-        </p:nvSpPr>
-        <p:spPr>
-          <a:xfrm>
-            <a:off x="3884613" y="0"/>
-            <a:ext cx="2971800" cy="458788"/>
-          </a:xfrm>
-          <a:prstGeom prst="rect">
-            <a:avLst/>
-          </a:prstGeom>
-        </p:spPr>
-        <p:txBody>
-          <a:bodyPr vert="horz" lIns="91440" tIns="45720" rIns="91440" bIns="45720" rtlCol="0"/>
-          <a:lstStyle>
-            <a:lvl1pPr algn="r">
-              <a:defRPr sz="1200"/>
-            </a:lvl1pPr>
-          </a:lstStyle>
-          <a:p>
-            <a:fld id="{5282F153-3F37-0F45-9E97-73ACFA13230C}" type="datetimeFigureOut">
-              <a:rPr lang="en-US"/>
-              <a:t>7/23/19</a:t>
-            </a:fld>
-            <a:endParaRPr lang="en-US"/>
-          </a:p>
-        </p:txBody>
-      </p:sp>
-      <p:sp>
-        <p:nvSpPr>
-          <p:cNvPr id="4" name="Slide Image Placeholder 3"/>
-          <p:cNvSpPr>
-            <a:spLocks noGrp="1" noRot="1" noChangeAspect="1"/>
-          </p:cNvSpPr>
-          <p:nvPr>
-            <p:ph type="sldImg" idx="2"/>
-          </p:nvPr>
-        </p:nvSpPr>
-        <p:spPr>
-          <a:xfrm>
-            <a:off x="685800" y="1143000"/>
-            <a:ext cx="5486400" cy="3086100"/>
-          </a:xfrm>
-          <a:prstGeom prst="rect">
-            <a:avLst/>
-          </a:prstGeom>
-          <a:noFill/>
-          <a:ln w="12700">
-            <a:solidFill>
-              <a:prstClr val="black"/>
-            </a:solidFill>
-          </a:ln>
-        </p:spPr>
-        <p:txBody>
-          <a:bodyPr vert="horz" lIns="91440" tIns="45720" rIns="91440" bIns="45720" rtlCol="0" anchor="ctr"/>
-          <a:lstStyle/>
-          <a:p>
-            <a:endParaRPr lang="en-US"/>
-          </a:p>
-        </p:txBody>
-      </p:sp>
-      <p:sp>
-        <p:nvSpPr>
-          <p:cNvPr id="5" name="Notes Placeholder 4"/>
-          <p:cNvSpPr>
-            <a:spLocks noGrp="1"/>
-          </p:cNvSpPr>
-          <p:nvPr>
-            <p:ph type="body" sz="quarter" idx="3"/>
-          </p:nvPr>
-        </p:nvSpPr>
-        <p:spPr>
-          <a:xfrm>
-            <a:off x="685800" y="4400550"/>
-            <a:ext cx="5486400" cy="3600450"/>
-          </a:xfrm>
-          <a:prstGeom prst="rect">
-            <a:avLst/>
-          </a:prstGeom>
-        </p:spPr>
-        <p:txBody>
-          <a:bodyPr vert="horz" lIns="91440" tIns="45720" rIns="91440" bIns="45720" rtlCol="0"/>
-          <a:lstStyle/>
-          <a:p>
-            <a:pPr lvl="0"/>
-            <a:r>
-              <a:rPr lang="en-US"/>
-              <a:t>Click to edit Master text styles</a:t>
-            </a:r>
-          </a:p>
-          <a:p>
-            <a:pPr lvl="1"/>
-            <a:r>
-              <a:rPr lang="en-US"/>
-              <a:t>Second level</a:t>
-            </a:r>
-          </a:p>
-          <a:p>
-            <a:pPr lvl="2"/>
-            <a:r>
-              <a:rPr lang="en-US"/>
-              <a:t>Third level</a:t>
-            </a:r>
-          </a:p>
-          <a:p>
-            <a:pPr lvl="3"/>
-            <a:r>
-              <a:rPr lang="en-US"/>
-              <a:t>Fourth level</a:t>
-            </a:r>
-          </a:p>
-          <a:p>
-            <a:pPr lvl="4"/>
-            <a:r>
-              <a:rPr lang="en-US"/>
-              <a:t>Fifth level</a:t>
-            </a:r>
-          </a:p>
-        </p:txBody>
-      </p:sp>
-      <p:sp>
-        <p:nvSpPr>
-          <p:cNvPr id="6" name="Footer Placeholder 5"/>
-          <p:cNvSpPr>
-            <a:spLocks noGrp="1"/>
-          </p:cNvSpPr>
-          <p:nvPr>
-            <p:ph type="ftr" sz="quarter" idx="4"/>
-          </p:nvPr>
-        </p:nvSpPr>
-        <p:spPr>
-          <a:xfrm>
-            <a:off x="0" y="8685213"/>
-            <a:ext cx="2971800" cy="458787"/>
-          </a:xfrm>
-          <a:prstGeom prst="rect">
-            <a:avLst/>
-          </a:prstGeom>
-        </p:spPr>
-        <p:txBody>
-          <a:bodyPr vert="horz" lIns="91440" tIns="45720" rIns="91440" bIns="45720" rtlCol="0" anchor="b"/>
-          <a:lstStyle>
-            <a:lvl1pPr algn="l">
-              <a:defRPr sz="1200"/>
-            </a:lvl1pPr>
-          </a:lstStyle>
-          <a:p>
-            <a:endParaRPr lang="en-US"/>
-          </a:p>
-        </p:txBody>
-      </p:sp>
-      <p:sp>
-        <p:nvSpPr>
-          <p:cNvPr id="7" name="Slide Number Placeholder 6"/>
-          <p:cNvSpPr>
-            <a:spLocks noGrp="1"/>
-          </p:cNvSpPr>
-          <p:nvPr>
-            <p:ph type="sldNum" sz="quarter" idx="5"/>
-          </p:nvPr>
-        </p:nvSpPr>
-        <p:spPr>
-          <a:xfrm>
-            <a:off x="3884613" y="8685213"/>
-            <a:ext cx="2971800" cy="458787"/>
-          </a:xfrm>
-          <a:prstGeom prst="rect">
-            <a:avLst/>
-          </a:prstGeom>
-        </p:spPr>
-        <p:txBody>
-          <a:bodyPr vert="horz" lIns="91440" tIns="45720" rIns="91440" bIns="45720" rtlCol="0" anchor="b"/>
-          <a:lstStyle>
-            <a:lvl1pPr algn="r">
-              <a:defRPr sz="1200"/>
-            </a:lvl1pPr>
-          </a:lstStyle>
-          <a:p>
-            <a:fld id="{CE5E9CC1-C706-0F49-92D6-E571CC5EEA8F}" type="slidenum">
-              <a:rPr lang="en-US"/>
-              <a:t>‹#›</a:t>
-            </a:fld>
-            <a:endParaRPr lang="en-US"/>
-          </a:p>
-        </p:txBody>
-      </p:sp>
     </p:spTree>
     <p:extLst>
       <p:ext uri="{BB962C8B-B14F-4D97-AF65-F5344CB8AC3E}">
-        <p14:creationId xmlns:p14="http://schemas.microsoft.com/office/powerpoint/2010/main" val="1024086991"/>
+        <p14:creationId xmlns:p14="http://schemas.microsoft.com/office/powerpoint/2010/main" val="1338746722"/>
       </p:ext>
     </p:extLst>
   </p:cSld>
@@ -507,10 +288,6 @@
           <a:bodyPr/>
           <a:lstStyle/>
           <a:p>
-            <a:r>
-              <a:rPr lang="en-US" dirty="0"/>
-              <a:t/>
-            </a:r>
             <a:endParaRPr lang="en-US" dirty="0"/>
           </a:p>
         </p:txBody>
@@ -595,10 +372,6 @@
           <a:bodyPr/>
           <a:lstStyle/>
           <a:p>
-            <a:r>
-              <a:rPr lang="en-US" dirty="0"/>
-              <a:t/>
-            </a:r>
             <a:endParaRPr lang="en-US" dirty="0"/>
           </a:p>
         </p:txBody>
@@ -683,10 +456,6 @@
           <a:bodyPr/>
           <a:lstStyle/>
           <a:p>
-            <a:r>
-              <a:rPr lang="en-US" dirty="0"/>
-              <a:t/>
-            </a:r>
             <a:endParaRPr lang="en-US" dirty="0"/>
           </a:p>
         </p:txBody>
@@ -771,10 +540,6 @@
           <a:bodyPr/>
           <a:lstStyle/>
           <a:p>
-            <a:r>
-              <a:rPr lang="en-US" dirty="0"/>
-              <a:t/>
-            </a:r>
             <a:endParaRPr lang="en-US" dirty="0"/>
           </a:p>
         </p:txBody>
@@ -859,10 +624,6 @@
           <a:bodyPr/>
           <a:lstStyle/>
           <a:p>
-            <a:r>
-              <a:rPr lang="en-US" dirty="0"/>
-              <a:t/>
-            </a:r>
             <a:endParaRPr lang="en-US" dirty="0"/>
           </a:p>
         </p:txBody>
@@ -947,10 +708,6 @@
           <a:bodyPr/>
           <a:lstStyle/>
           <a:p>
-            <a:r>
-              <a:rPr lang="en-US" dirty="0"/>
-              <a:t/>
-            </a:r>
             <a:endParaRPr lang="en-US" dirty="0"/>
           </a:p>
         </p:txBody>
@@ -1035,10 +792,6 @@
           <a:bodyPr/>
           <a:lstStyle/>
           <a:p>
-            <a:r>
-              <a:rPr lang="en-US" dirty="0"/>
-              <a:t/>
-            </a:r>
             <a:endParaRPr lang="en-US" dirty="0"/>
           </a:p>
         </p:txBody>
@@ -1123,10 +876,6 @@
           <a:bodyPr/>
           <a:lstStyle/>
           <a:p>
-            <a:r>
-              <a:rPr lang="en-US" dirty="0"/>
-              <a:t/>
-            </a:r>
             <a:endParaRPr lang="en-US" dirty="0"/>
           </a:p>
         </p:txBody>
@@ -1200,6 +949,11 @@
 <file path=ppt/slideMasters/slideMaster1.xml><?xml version="1.0" encoding="utf-8"?>
 <p:sldMaster xmlns:a="http://schemas.openxmlformats.org/drawingml/2006/main" xmlns:r="http://schemas.openxmlformats.org/officeDocument/2006/relationships" xmlns:p="http://schemas.openxmlformats.org/presentationml/2006/main">
   <p:cSld>
+    <p:bg>
+      <p:bgRef idx="1001">
+        <a:schemeClr val="bg1"/>
+      </p:bgRef>
+    </p:bg>
     <p:spTree>
       <p:nvGrpSpPr>
         <p:cNvPr id="1" name=""/>
@@ -1482,6 +1236,7 @@
         <a:solidFill>
           <a:srgbClr val="FFFFFF"/>
         </a:solidFill>
+        <a:effectLst/>
       </p:bgPr>
     </p:bg>
     <p:spTree>
@@ -1506,7 +1261,7 @@
         </p:nvSpPr>
         <p:spPr>
           <a:xfrm>
-            <a:off x="0" y="0"/>
+            <a:off x="0" y="9832"/>
             <a:ext cx="4206240" cy="5143500"/>
           </a:xfrm>
           <a:prstGeom prst="rect">
@@ -1531,7 +1286,7 @@
         </p:nvSpPr>
         <p:spPr>
           <a:xfrm>
-            <a:off x="320040" y="1097280"/>
+            <a:off x="320040" y="241874"/>
             <a:ext cx="3566160" cy="2011680"/>
           </a:xfrm>
           <a:prstGeom prst="rect">
@@ -1544,11 +1299,11 @@
           <a:bodyPr wrap="square" rtlCol="0" anchor="ctr"/>
           <a:lstStyle/>
           <a:p>
-            <a:pPr indent="0" marL="0">
-              <a:buNone/>
-            </a:pPr>
-            <a:r>
-              <a:rPr lang="en-US" sz="5200" b="1" dirty="0">
+            <a:pPr marL="0" indent="0">
+              <a:buNone/>
+            </a:pPr>
+            <a:r>
+              <a:rPr lang="en-US" sz="6000" b="1" dirty="0">
                 <a:solidFill>
                   <a:srgbClr val="FFFFFF"/>
                 </a:solidFill>
@@ -1558,14 +1313,14 @@
               </a:rPr>
               <a:t>Fire</a:t>
             </a:r>
-            <a:endParaRPr lang="en-US" sz="5200" dirty="0"/>
-          </a:p>
-          <a:p>
-            <a:pPr indent="0" marL="0">
-              <a:buNone/>
-            </a:pPr>
-            <a:r>
-              <a:rPr lang="en-US" sz="5200" b="1" dirty="0">
+            <a:endParaRPr lang="en-US" sz="6000" dirty="0"/>
+          </a:p>
+          <a:p>
+            <a:pPr marL="0" indent="0">
+              <a:buNone/>
+            </a:pPr>
+            <a:r>
+              <a:rPr lang="en-US" sz="6000" b="1" dirty="0">
                 <a:solidFill>
                   <a:srgbClr val="FFFFFF"/>
                 </a:solidFill>
@@ -1575,7 +1330,7 @@
               </a:rPr>
               <a:t>Detection</a:t>
             </a:r>
-            <a:endParaRPr lang="en-US" sz="5200" dirty="0"/>
+            <a:endParaRPr lang="en-US" sz="6000" dirty="0"/>
           </a:p>
         </p:txBody>
       </p:sp>
@@ -1600,11 +1355,11 @@
           <a:bodyPr wrap="square" rtlCol="0" anchor="ctr"/>
           <a:lstStyle/>
           <a:p>
-            <a:pPr indent="0" marL="0">
-              <a:buNone/>
-            </a:pPr>
-            <a:r>
-              <a:rPr lang="en-US" sz="1600" dirty="0">
+            <a:pPr marL="0" indent="0">
+              <a:buNone/>
+            </a:pPr>
+            <a:r>
+              <a:rPr lang="en-US" sz="2000" dirty="0">
                 <a:solidFill>
                   <a:srgbClr val="BFDBFE"/>
                 </a:solidFill>
@@ -1614,13 +1369,13 @@
               </a:rPr>
               <a:t>Pipeline Deep Learning</a:t>
             </a:r>
-            <a:endParaRPr lang="en-US" sz="1600" dirty="0"/>
-          </a:p>
-        </p:txBody>
-      </p:sp>
-      <p:sp>
-        <p:nvSpPr>
-          <p:cNvPr id="5" name="Shape 3"/>
+            <a:endParaRPr lang="en-US" sz="2000" dirty="0"/>
+          </a:p>
+        </p:txBody>
+      </p:sp>
+      <p:sp>
+        <p:nvSpPr>
+          <p:cNvPr id="6" name="Text 4"/>
           <p:cNvSpPr/>
           <p:nvPr/>
         </p:nvSpPr>
@@ -1629,48 +1384,21 @@
             <a:off x="320040" y="3703320"/>
             <a:ext cx="1691640" cy="274320"/>
           </a:xfrm>
-          <a:prstGeom prst="roundRect">
-            <a:avLst>
-              <a:gd name="adj" fmla="val 13333"/>
-            </a:avLst>
-          </a:prstGeom>
-          <a:solidFill>
-            <a:srgbClr val="1D4ED8"/>
-          </a:solidFill>
-          <a:ln w="12700">
-            <a:solidFill>
-              <a:srgbClr val="93C5FD"/>
-            </a:solidFill>
-            <a:prstDash val="solid"/>
-          </a:ln>
-        </p:spPr>
-      </p:sp>
-      <p:sp>
-        <p:nvSpPr>
-          <p:cNvPr id="6" name="Text 4"/>
-          <p:cNvSpPr/>
-          <p:nvPr/>
-        </p:nvSpPr>
-        <p:spPr>
-          <a:xfrm>
-            <a:off x="320040" y="3703320"/>
-            <a:ext cx="1691640" cy="274320"/>
-          </a:xfrm>
-          <a:prstGeom prst="rect">
-            <a:avLst/>
-          </a:prstGeom>
-          <a:noFill/>
-          <a:ln/>
-        </p:spPr>
-        <p:txBody>
-          <a:bodyPr wrap="square" rtlCol="0" anchor="ctr"/>
-          <a:lstStyle/>
-          <a:p>
-            <a:pPr algn="ctr" indent="0" marL="0">
-              <a:buNone/>
-            </a:pPr>
-            <a:r>
-              <a:rPr lang="en-US" sz="1100" dirty="0">
+          <a:prstGeom prst="rect">
+            <a:avLst/>
+          </a:prstGeom>
+          <a:noFill/>
+          <a:ln/>
+        </p:spPr>
+        <p:txBody>
+          <a:bodyPr wrap="square" rtlCol="0" anchor="ctr"/>
+          <a:lstStyle/>
+          <a:p>
+            <a:pPr marL="0" indent="0" algn="ctr">
+              <a:buNone/>
+            </a:pPr>
+            <a:r>
+              <a:rPr lang="en-US" sz="1400" dirty="0">
                 <a:solidFill>
                   <a:srgbClr val="FFFFFF"/>
                 </a:solidFill>
@@ -1680,13 +1408,13 @@
               </a:rPr>
               <a:t>2 classes</a:t>
             </a:r>
-            <a:endParaRPr lang="en-US" sz="1100" dirty="0"/>
-          </a:p>
-        </p:txBody>
-      </p:sp>
-      <p:sp>
-        <p:nvSpPr>
-          <p:cNvPr id="7" name="Shape 5"/>
+            <a:endParaRPr lang="en-US" sz="1400" dirty="0"/>
+          </a:p>
+        </p:txBody>
+      </p:sp>
+      <p:sp>
+        <p:nvSpPr>
+          <p:cNvPr id="8" name="Text 6"/>
           <p:cNvSpPr/>
           <p:nvPr/>
         </p:nvSpPr>
@@ -1695,48 +1423,21 @@
             <a:off x="320040" y="4050792"/>
             <a:ext cx="1691640" cy="274320"/>
           </a:xfrm>
-          <a:prstGeom prst="roundRect">
-            <a:avLst>
-              <a:gd name="adj" fmla="val 13333"/>
-            </a:avLst>
-          </a:prstGeom>
-          <a:solidFill>
-            <a:srgbClr val="1D4ED8"/>
-          </a:solidFill>
-          <a:ln w="12700">
-            <a:solidFill>
-              <a:srgbClr val="93C5FD"/>
-            </a:solidFill>
-            <a:prstDash val="solid"/>
-          </a:ln>
-        </p:spPr>
-      </p:sp>
-      <p:sp>
-        <p:nvSpPr>
-          <p:cNvPr id="8" name="Text 6"/>
-          <p:cNvSpPr/>
-          <p:nvPr/>
-        </p:nvSpPr>
-        <p:spPr>
-          <a:xfrm>
-            <a:off x="320040" y="4050792"/>
-            <a:ext cx="1691640" cy="274320"/>
-          </a:xfrm>
-          <a:prstGeom prst="rect">
-            <a:avLst/>
-          </a:prstGeom>
-          <a:noFill/>
-          <a:ln/>
-        </p:spPr>
-        <p:txBody>
-          <a:bodyPr wrap="square" rtlCol="0" anchor="ctr"/>
-          <a:lstStyle/>
-          <a:p>
-            <a:pPr algn="ctr" indent="0" marL="0">
-              <a:buNone/>
-            </a:pPr>
-            <a:r>
-              <a:rPr lang="en-US" sz="1100" dirty="0">
+          <a:prstGeom prst="rect">
+            <a:avLst/>
+          </a:prstGeom>
+          <a:noFill/>
+          <a:ln/>
+        </p:spPr>
+        <p:txBody>
+          <a:bodyPr wrap="square" rtlCol="0" anchor="ctr"/>
+          <a:lstStyle/>
+          <a:p>
+            <a:pPr marL="0" indent="0" algn="ctr">
+              <a:buNone/>
+            </a:pPr>
+            <a:r>
+              <a:rPr lang="en-US" sz="1400" dirty="0" smtClean="0">
                 <a:solidFill>
                   <a:srgbClr val="FFFFFF"/>
                 </a:solidFill>
@@ -1744,15 +1445,26 @@
                 <a:ea typeface="Calibri" pitchFamily="34" charset="-122"/>
                 <a:cs typeface="Calibri" pitchFamily="34" charset="-120"/>
               </a:rPr>
-              <a:t>~1 200 images</a:t>
-            </a:r>
-            <a:endParaRPr lang="en-US" sz="1100" dirty="0"/>
-          </a:p>
-        </p:txBody>
-      </p:sp>
-      <p:sp>
-        <p:nvSpPr>
-          <p:cNvPr id="9" name="Shape 7"/>
+              <a:t>1 </a:t>
+            </a:r>
+            <a:r>
+              <a:rPr lang="en-US" sz="1400" dirty="0">
+                <a:solidFill>
+                  <a:srgbClr val="FFFFFF"/>
+                </a:solidFill>
+                <a:latin typeface="Calibri" pitchFamily="34" charset="0"/>
+                <a:ea typeface="Calibri" pitchFamily="34" charset="-122"/>
+                <a:cs typeface="Calibri" pitchFamily="34" charset="-120"/>
+              </a:rPr>
+              <a:t>200 images</a:t>
+            </a:r>
+            <a:endParaRPr lang="en-US" sz="1400" dirty="0"/>
+          </a:p>
+        </p:txBody>
+      </p:sp>
+      <p:sp>
+        <p:nvSpPr>
+          <p:cNvPr id="10" name="Text 8"/>
           <p:cNvSpPr/>
           <p:nvPr/>
         </p:nvSpPr>
@@ -1761,48 +1473,21 @@
             <a:off x="320040" y="4398264"/>
             <a:ext cx="1691640" cy="274320"/>
           </a:xfrm>
-          <a:prstGeom prst="roundRect">
-            <a:avLst>
-              <a:gd name="adj" fmla="val 13333"/>
-            </a:avLst>
-          </a:prstGeom>
-          <a:solidFill>
-            <a:srgbClr val="1D4ED8"/>
-          </a:solidFill>
-          <a:ln w="12700">
-            <a:solidFill>
-              <a:srgbClr val="93C5FD"/>
-            </a:solidFill>
-            <a:prstDash val="solid"/>
-          </a:ln>
-        </p:spPr>
-      </p:sp>
-      <p:sp>
-        <p:nvSpPr>
-          <p:cNvPr id="10" name="Text 8"/>
-          <p:cNvSpPr/>
-          <p:nvPr/>
-        </p:nvSpPr>
-        <p:spPr>
-          <a:xfrm>
-            <a:off x="320040" y="4398264"/>
-            <a:ext cx="1691640" cy="274320"/>
-          </a:xfrm>
-          <a:prstGeom prst="rect">
-            <a:avLst/>
-          </a:prstGeom>
-          <a:noFill/>
-          <a:ln/>
-        </p:spPr>
-        <p:txBody>
-          <a:bodyPr wrap="square" rtlCol="0" anchor="ctr"/>
-          <a:lstStyle/>
-          <a:p>
-            <a:pPr algn="ctr" indent="0" marL="0">
-              <a:buNone/>
-            </a:pPr>
-            <a:r>
-              <a:rPr lang="en-US" sz="1100" dirty="0">
+          <a:prstGeom prst="rect">
+            <a:avLst/>
+          </a:prstGeom>
+          <a:noFill/>
+          <a:ln/>
+        </p:spPr>
+        <p:txBody>
+          <a:bodyPr wrap="square" rtlCol="0" anchor="ctr"/>
+          <a:lstStyle/>
+          <a:p>
+            <a:pPr marL="0" indent="0" algn="ctr">
+              <a:buNone/>
+            </a:pPr>
+            <a:r>
+              <a:rPr lang="en-US" sz="1400" dirty="0">
                 <a:solidFill>
                   <a:srgbClr val="FFFFFF"/>
                 </a:solidFill>
@@ -1812,7 +1497,7 @@
               </a:rPr>
               <a:t>10 epochs</a:t>
             </a:r>
-            <a:endParaRPr lang="en-US" sz="1100" dirty="0"/>
+            <a:endParaRPr lang="en-US" sz="1400" dirty="0"/>
           </a:p>
         </p:txBody>
       </p:sp>
@@ -1837,11 +1522,11 @@
           <a:bodyPr wrap="square" rtlCol="0" anchor="ctr"/>
           <a:lstStyle/>
           <a:p>
-            <a:pPr indent="0" marL="0">
-              <a:buNone/>
-            </a:pPr>
-            <a:r>
-              <a:rPr lang="en-US" sz="1400" b="1" dirty="0">
+            <a:pPr marL="0" indent="0">
+              <a:buNone/>
+            </a:pPr>
+            <a:r>
+              <a:rPr lang="en-US" b="1" dirty="0">
                 <a:solidFill>
                   <a:srgbClr val="64748B"/>
                 </a:solidFill>
@@ -1851,7 +1536,7 @@
               </a:rPr>
               <a:t>Présentation du travail</a:t>
             </a:r>
-            <a:endParaRPr lang="en-US" sz="1400" dirty="0"/>
+            <a:endParaRPr lang="en-US" dirty="0"/>
           </a:p>
         </p:txBody>
       </p:sp>
@@ -1876,11 +1561,11 @@
           <a:bodyPr wrap="square" rtlCol="0" anchor="ctr"/>
           <a:lstStyle/>
           <a:p>
-            <a:pPr indent="0" marL="0">
-              <a:buNone/>
-            </a:pPr>
-            <a:r>
-              <a:rPr lang="en-US" sz="1100" b="1" dirty="0">
+            <a:pPr marL="0" indent="0">
+              <a:buNone/>
+            </a:pPr>
+            <a:r>
+              <a:rPr lang="en-US" sz="1400" b="1" dirty="0">
                 <a:solidFill>
                   <a:srgbClr val="64748B"/>
                 </a:solidFill>
@@ -1890,7 +1575,7 @@
               </a:rPr>
               <a:t>Dataset</a:t>
             </a:r>
-            <a:endParaRPr lang="en-US" sz="1100" dirty="0"/>
+            <a:endParaRPr lang="en-US" sz="1400" dirty="0"/>
           </a:p>
         </p:txBody>
       </p:sp>
@@ -1915,11 +1600,11 @@
           <a:bodyPr wrap="square" rtlCol="0" anchor="ctr"/>
           <a:lstStyle/>
           <a:p>
-            <a:pPr indent="0" marL="0">
-              <a:buNone/>
-            </a:pPr>
-            <a:r>
-              <a:rPr lang="en-US" sz="1200" dirty="0">
+            <a:pPr marL="0" indent="0">
+              <a:buNone/>
+            </a:pPr>
+            <a:r>
+              <a:rPr lang="en-US" sz="1600" dirty="0">
                 <a:solidFill>
                   <a:srgbClr val="1E293B"/>
                 </a:solidFill>
@@ -1929,7 +1614,7 @@
               </a:rPr>
               <a:t>phylake1337/fire-dataset</a:t>
             </a:r>
-            <a:endParaRPr lang="en-US" sz="1200" dirty="0"/>
+            <a:endParaRPr lang="en-US" sz="1600" dirty="0"/>
           </a:p>
         </p:txBody>
       </p:sp>
@@ -1979,11 +1664,11 @@
           <a:bodyPr wrap="square" rtlCol="0" anchor="ctr"/>
           <a:lstStyle/>
           <a:p>
-            <a:pPr indent="0" marL="0">
-              <a:buNone/>
-            </a:pPr>
-            <a:r>
-              <a:rPr lang="en-US" sz="1100" b="1" dirty="0">
+            <a:pPr marL="0" indent="0">
+              <a:buNone/>
+            </a:pPr>
+            <a:r>
+              <a:rPr lang="en-US" sz="1400" b="1" dirty="0">
                 <a:solidFill>
                   <a:srgbClr val="64748B"/>
                 </a:solidFill>
@@ -1993,7 +1678,7 @@
               </a:rPr>
               <a:t>Framework</a:t>
             </a:r>
-            <a:endParaRPr lang="en-US" sz="1100" dirty="0"/>
+            <a:endParaRPr lang="en-US" sz="1400" dirty="0"/>
           </a:p>
         </p:txBody>
       </p:sp>
@@ -2018,11 +1703,11 @@
           <a:bodyPr wrap="square" rtlCol="0" anchor="ctr"/>
           <a:lstStyle/>
           <a:p>
-            <a:pPr indent="0" marL="0">
-              <a:buNone/>
-            </a:pPr>
-            <a:r>
-              <a:rPr lang="en-US" sz="1200" dirty="0">
+            <a:pPr marL="0" indent="0">
+              <a:buNone/>
+            </a:pPr>
+            <a:r>
+              <a:rPr lang="en-US" sz="1600" dirty="0">
                 <a:solidFill>
                   <a:srgbClr val="1E293B"/>
                 </a:solidFill>
@@ -2032,7 +1717,7 @@
               </a:rPr>
               <a:t>PyTorch · torchvision</a:t>
             </a:r>
-            <a:endParaRPr lang="en-US" sz="1200" dirty="0"/>
+            <a:endParaRPr lang="en-US" sz="1600" dirty="0"/>
           </a:p>
         </p:txBody>
       </p:sp>
@@ -2082,11 +1767,11 @@
           <a:bodyPr wrap="square" rtlCol="0" anchor="ctr"/>
           <a:lstStyle/>
           <a:p>
-            <a:pPr indent="0" marL="0">
-              <a:buNone/>
-            </a:pPr>
-            <a:r>
-              <a:rPr lang="en-US" sz="1100" b="1" dirty="0">
+            <a:pPr marL="0" indent="0">
+              <a:buNone/>
+            </a:pPr>
+            <a:r>
+              <a:rPr lang="en-US" sz="1400" b="1" dirty="0">
                 <a:solidFill>
                   <a:srgbClr val="64748B"/>
                 </a:solidFill>
@@ -2096,7 +1781,7 @@
               </a:rPr>
               <a:t>Tâche</a:t>
             </a:r>
-            <a:endParaRPr lang="en-US" sz="1100" dirty="0"/>
+            <a:endParaRPr lang="en-US" sz="1400" dirty="0"/>
           </a:p>
         </p:txBody>
       </p:sp>
@@ -2121,11 +1806,11 @@
           <a:bodyPr wrap="square" rtlCol="0" anchor="ctr"/>
           <a:lstStyle/>
           <a:p>
-            <a:pPr indent="0" marL="0">
-              <a:buNone/>
-            </a:pPr>
-            <a:r>
-              <a:rPr lang="en-US" sz="1200" dirty="0">
+            <a:pPr marL="0" indent="0">
+              <a:buNone/>
+            </a:pPr>
+            <a:r>
+              <a:rPr lang="en-US" sz="1600" dirty="0">
                 <a:solidFill>
                   <a:srgbClr val="1E293B"/>
                 </a:solidFill>
@@ -2135,7 +1820,7 @@
               </a:rPr>
               <a:t>Classification binaire</a:t>
             </a:r>
-            <a:endParaRPr lang="en-US" sz="1200" dirty="0"/>
+            <a:endParaRPr lang="en-US" sz="1600" dirty="0"/>
           </a:p>
         </p:txBody>
       </p:sp>
@@ -2185,11 +1870,11 @@
           <a:bodyPr wrap="square" rtlCol="0" anchor="ctr"/>
           <a:lstStyle/>
           <a:p>
-            <a:pPr indent="0" marL="0">
-              <a:buNone/>
-            </a:pPr>
-            <a:r>
-              <a:rPr lang="en-US" sz="1100" b="1" dirty="0">
+            <a:pPr marL="0" indent="0">
+              <a:buNone/>
+            </a:pPr>
+            <a:r>
+              <a:rPr lang="en-US" sz="1400" b="1" dirty="0">
                 <a:solidFill>
                   <a:srgbClr val="64748B"/>
                 </a:solidFill>
@@ -2199,7 +1884,7 @@
               </a:rPr>
               <a:t>Modèles</a:t>
             </a:r>
-            <a:endParaRPr lang="en-US" sz="1100" dirty="0"/>
+            <a:endParaRPr lang="en-US" sz="1400" dirty="0"/>
           </a:p>
         </p:txBody>
       </p:sp>
@@ -2224,11 +1909,11 @@
           <a:bodyPr wrap="square" rtlCol="0" anchor="ctr"/>
           <a:lstStyle/>
           <a:p>
-            <a:pPr indent="0" marL="0">
-              <a:buNone/>
-            </a:pPr>
-            <a:r>
-              <a:rPr lang="en-US" sz="1200" dirty="0">
+            <a:pPr marL="0" indent="0">
+              <a:buNone/>
+            </a:pPr>
+            <a:r>
+              <a:rPr lang="en-US" sz="1600" dirty="0">
                 <a:solidFill>
                   <a:srgbClr val="1E293B"/>
                 </a:solidFill>
@@ -2238,7 +1923,7 @@
               </a:rPr>
               <a:t>SimpleCNN · ResNet-50 · EfficientNet-B0</a:t>
             </a:r>
-            <a:endParaRPr lang="en-US" sz="1200" dirty="0"/>
+            <a:endParaRPr lang="en-US" sz="1600" dirty="0"/>
           </a:p>
         </p:txBody>
       </p:sp>
@@ -2250,7 +1935,7 @@
         </p:nvSpPr>
         <p:spPr>
           <a:xfrm>
-            <a:off x="4572000" y="3529584"/>
+            <a:off x="4572000" y="3686898"/>
             <a:ext cx="4206240" cy="10973"/>
           </a:xfrm>
           <a:prstGeom prst="rect">
@@ -2288,11 +1973,11 @@
           <a:bodyPr wrap="square" rtlCol="0" anchor="ctr"/>
           <a:lstStyle/>
           <a:p>
-            <a:pPr indent="0" marL="0">
-              <a:buNone/>
-            </a:pPr>
-            <a:r>
-              <a:rPr lang="en-US" sz="1300" b="1" dirty="0">
+            <a:pPr marL="0" indent="0">
+              <a:buNone/>
+            </a:pPr>
+            <a:r>
+              <a:rPr lang="en-US" sz="1600" b="1" dirty="0">
                 <a:solidFill>
                   <a:srgbClr val="1E40AF"/>
                 </a:solidFill>
@@ -2302,7 +1987,7 @@
               </a:rPr>
               <a:t>Plan</a:t>
             </a:r>
-            <a:endParaRPr lang="en-US" sz="1300" dirty="0"/>
+            <a:endParaRPr lang="en-US" sz="1600" dirty="0"/>
           </a:p>
         </p:txBody>
       </p:sp>
@@ -2352,18 +2037,18 @@
           <a:bodyPr wrap="square" rtlCol="0" anchor="ctr"/>
           <a:lstStyle/>
           <a:p>
-            <a:pPr algn="ctr" indent="0" marL="0">
-              <a:buNone/>
-            </a:pPr>
-            <a:r>
-              <a:rPr lang="en-US" sz="900" b="1" dirty="0">
+            <a:pPr marL="0" indent="0" algn="ctr">
+              <a:buNone/>
+            </a:pPr>
+            <a:r>
+              <a:rPr lang="en-US" sz="1050" b="1" dirty="0">
                 <a:solidFill>
                   <a:srgbClr val="FFFFFF"/>
                 </a:solidFill>
               </a:rPr>
               <a:t>1</a:t>
             </a:r>
-            <a:endParaRPr lang="en-US" sz="900" dirty="0"/>
+            <a:endParaRPr lang="en-US" sz="1050" dirty="0"/>
           </a:p>
         </p:txBody>
       </p:sp>
@@ -2388,11 +2073,11 @@
           <a:bodyPr wrap="square" rtlCol="0" anchor="ctr"/>
           <a:lstStyle/>
           <a:p>
-            <a:pPr indent="0" marL="0">
-              <a:buNone/>
-            </a:pPr>
-            <a:r>
-              <a:rPr lang="en-US" sz="1200" dirty="0">
+            <a:pPr marL="0" indent="0">
+              <a:buNone/>
+            </a:pPr>
+            <a:r>
+              <a:rPr lang="en-US" sz="1600" dirty="0">
                 <a:solidFill>
                   <a:srgbClr val="1E293B"/>
                 </a:solidFill>
@@ -2402,7 +2087,7 @@
               </a:rPr>
               <a:t>Pipeline &amp; Données</a:t>
             </a:r>
-            <a:endParaRPr lang="en-US" sz="1200" dirty="0"/>
+            <a:endParaRPr lang="en-US" sz="1600" dirty="0"/>
           </a:p>
         </p:txBody>
       </p:sp>
@@ -2452,18 +2137,18 @@
           <a:bodyPr wrap="square" rtlCol="0" anchor="ctr"/>
           <a:lstStyle/>
           <a:p>
-            <a:pPr algn="ctr" indent="0" marL="0">
-              <a:buNone/>
-            </a:pPr>
-            <a:r>
-              <a:rPr lang="en-US" sz="900" b="1" dirty="0">
+            <a:pPr marL="0" indent="0" algn="ctr">
+              <a:buNone/>
+            </a:pPr>
+            <a:r>
+              <a:rPr lang="en-US" sz="1050" b="1" dirty="0">
                 <a:solidFill>
                   <a:srgbClr val="FFFFFF"/>
                 </a:solidFill>
               </a:rPr>
               <a:t>2</a:t>
             </a:r>
-            <a:endParaRPr lang="en-US" sz="900" dirty="0"/>
+            <a:endParaRPr lang="en-US" sz="1050" dirty="0"/>
           </a:p>
         </p:txBody>
       </p:sp>
@@ -2488,11 +2173,11 @@
           <a:bodyPr wrap="square" rtlCol="0" anchor="ctr"/>
           <a:lstStyle/>
           <a:p>
-            <a:pPr indent="0" marL="0">
-              <a:buNone/>
-            </a:pPr>
-            <a:r>
-              <a:rPr lang="en-US" sz="1200" dirty="0">
+            <a:pPr marL="0" indent="0">
+              <a:buNone/>
+            </a:pPr>
+            <a:r>
+              <a:rPr lang="en-US" sz="1600" dirty="0">
                 <a:solidFill>
                   <a:srgbClr val="1E293B"/>
                 </a:solidFill>
@@ -2502,7 +2187,7 @@
               </a:rPr>
               <a:t>3 Architectures comparées</a:t>
             </a:r>
-            <a:endParaRPr lang="en-US" sz="1200" dirty="0"/>
+            <a:endParaRPr lang="en-US" sz="1600" dirty="0"/>
           </a:p>
         </p:txBody>
       </p:sp>
@@ -2552,18 +2237,18 @@
           <a:bodyPr wrap="square" rtlCol="0" anchor="ctr"/>
           <a:lstStyle/>
           <a:p>
-            <a:pPr algn="ctr" indent="0" marL="0">
-              <a:buNone/>
-            </a:pPr>
-            <a:r>
-              <a:rPr lang="en-US" sz="900" b="1" dirty="0">
+            <a:pPr marL="0" indent="0" algn="ctr">
+              <a:buNone/>
+            </a:pPr>
+            <a:r>
+              <a:rPr lang="en-US" sz="1050" b="1" dirty="0">
                 <a:solidFill>
                   <a:srgbClr val="FFFFFF"/>
                 </a:solidFill>
               </a:rPr>
               <a:t>3</a:t>
             </a:r>
-            <a:endParaRPr lang="en-US" sz="900" dirty="0"/>
+            <a:endParaRPr lang="en-US" sz="1050" dirty="0"/>
           </a:p>
         </p:txBody>
       </p:sp>
@@ -2588,11 +2273,11 @@
           <a:bodyPr wrap="square" rtlCol="0" anchor="ctr"/>
           <a:lstStyle/>
           <a:p>
-            <a:pPr indent="0" marL="0">
-              <a:buNone/>
-            </a:pPr>
-            <a:r>
-              <a:rPr lang="en-US" sz="1200" dirty="0">
+            <a:pPr marL="0" indent="0">
+              <a:buNone/>
+            </a:pPr>
+            <a:r>
+              <a:rPr lang="en-US" sz="1600" dirty="0">
                 <a:solidFill>
                   <a:srgbClr val="1E293B"/>
                 </a:solidFill>
@@ -2602,7 +2287,7 @@
               </a:rPr>
               <a:t>Résultats &amp; Interprétation</a:t>
             </a:r>
-            <a:endParaRPr lang="en-US" sz="1200" dirty="0"/>
+            <a:endParaRPr lang="en-US" sz="1600" dirty="0"/>
           </a:p>
         </p:txBody>
       </p:sp>
@@ -2622,6 +2307,7 @@
         <a:solidFill>
           <a:srgbClr val="FFFFFF"/>
         </a:solidFill>
+        <a:effectLst/>
       </p:bgPr>
     </p:bg>
     <p:spTree>
@@ -2640,31 +2326,6 @@
       </p:grpSpPr>
       <p:sp>
         <p:nvSpPr>
-          <p:cNvPr id="2" name="Shape 0"/>
-          <p:cNvSpPr/>
-          <p:nvPr/>
-        </p:nvSpPr>
-        <p:spPr>
-          <a:xfrm>
-            <a:off x="320040" y="201168"/>
-            <a:ext cx="64008" cy="502920"/>
-          </a:xfrm>
-          <a:prstGeom prst="rect">
-            <a:avLst/>
-          </a:prstGeom>
-          <a:solidFill>
-            <a:srgbClr val="1E40AF"/>
-          </a:solidFill>
-          <a:ln w="12700">
-            <a:solidFill>
-              <a:srgbClr val="1E40AF"/>
-            </a:solidFill>
-            <a:prstDash val="solid"/>
-          </a:ln>
-        </p:spPr>
-      </p:sp>
-      <p:sp>
-        <p:nvSpPr>
           <p:cNvPr id="3" name="Text 1"/>
           <p:cNvSpPr/>
           <p:nvPr/>
@@ -2684,7 +2345,7 @@
           <a:bodyPr wrap="square" lIns="0" tIns="0" rIns="0" bIns="0" rtlCol="0" anchor="ctr"/>
           <a:lstStyle/>
           <a:p>
-            <a:pPr indent="0" marL="0">
+            <a:pPr marL="0" indent="0">
               <a:buNone/>
             </a:pPr>
             <a:r>
@@ -2699,45 +2360,6 @@
               <a:t>Pipeline</a:t>
             </a:r>
             <a:endParaRPr lang="en-US" sz="2600" dirty="0"/>
-          </a:p>
-        </p:txBody>
-      </p:sp>
-      <p:sp>
-        <p:nvSpPr>
-          <p:cNvPr id="4" name="Text 2"/>
-          <p:cNvSpPr/>
-          <p:nvPr/>
-        </p:nvSpPr>
-        <p:spPr>
-          <a:xfrm>
-            <a:off x="475488" y="694944"/>
-            <a:ext cx="8229600" cy="256032"/>
-          </a:xfrm>
-          <a:prstGeom prst="rect">
-            <a:avLst/>
-          </a:prstGeom>
-          <a:noFill/>
-          <a:ln/>
-        </p:spPr>
-        <p:txBody>
-          <a:bodyPr wrap="square" lIns="0" tIns="0" rIns="0" bIns="0" rtlCol="0" anchor="ctr"/>
-          <a:lstStyle/>
-          <a:p>
-            <a:pPr indent="0" marL="0">
-              <a:buNone/>
-            </a:pPr>
-            <a:r>
-              <a:rPr lang="en-US" sz="1200" i="1" dirty="0">
-                <a:solidFill>
-                  <a:srgbClr val="64748B"/>
-                </a:solidFill>
-                <a:latin typeface="Calibri" pitchFamily="34" charset="0"/>
-                <a:ea typeface="Calibri" pitchFamily="34" charset="-122"/>
-                <a:cs typeface="Calibri" pitchFamily="34" charset="-120"/>
-              </a:rPr>
-              <a:t>Du dataset au modèle entraîné</a:t>
-            </a:r>
-            <a:endParaRPr lang="en-US" sz="1200" dirty="0"/>
           </a:p>
         </p:txBody>
       </p:sp>
@@ -2790,7 +2412,7 @@
             <a:prstDash val="solid"/>
           </a:ln>
           <a:effectLst>
-            <a:outerShdw sx="100000" sy="100000" kx="0" ky="0" algn="bl" rotWithShape="0" blurRad="76200" dist="25400" dir="8100000">
+            <a:outerShdw blurRad="76200" dist="25400" dir="8100000" algn="bl" rotWithShape="0">
               <a:srgbClr val="000000">
                 <a:alpha val="7000"/>
               </a:srgbClr>
@@ -2844,7 +2466,7 @@
           <a:bodyPr wrap="square" rtlCol="0" anchor="ctr"/>
           <a:lstStyle/>
           <a:p>
-            <a:pPr algn="ctr" indent="0" marL="0">
+            <a:pPr marL="0" indent="0" algn="ctr">
               <a:buNone/>
             </a:pPr>
             <a:r>
@@ -2883,7 +2505,7 @@
           <a:bodyPr wrap="square" rtlCol="0" anchor="ctr"/>
           <a:lstStyle/>
           <a:p>
-            <a:pPr algn="ctr" indent="0" marL="0">
+            <a:pPr marL="0" indent="0" algn="ctr">
               <a:buNone/>
             </a:pPr>
             <a:r>
@@ -2919,11 +2541,11 @@
           <a:bodyPr wrap="square" rtlCol="0" anchor="ctr"/>
           <a:lstStyle/>
           <a:p>
-            <a:pPr algn="ctr" indent="0" marL="0">
-              <a:buNone/>
-            </a:pPr>
-            <a:r>
-              <a:rPr lang="en-US" sz="1200" b="1" dirty="0">
+            <a:pPr marL="0" indent="0" algn="ctr">
+              <a:buNone/>
+            </a:pPr>
+            <a:r>
+              <a:rPr lang="en-US" sz="1400" b="1" dirty="0">
                 <a:solidFill>
                   <a:srgbClr val="1E40AF"/>
                 </a:solidFill>
@@ -2933,7 +2555,7 @@
               </a:rPr>
               <a:t>Dataset</a:t>
             </a:r>
-            <a:endParaRPr lang="en-US" sz="1200" dirty="0"/>
+            <a:endParaRPr lang="en-US" sz="1400" dirty="0"/>
           </a:p>
         </p:txBody>
       </p:sp>
@@ -2958,11 +2580,11 @@
           <a:bodyPr wrap="square" rtlCol="0" anchor="ctr"/>
           <a:lstStyle/>
           <a:p>
-            <a:pPr algn="ctr" indent="0" marL="0">
-              <a:buNone/>
-            </a:pPr>
-            <a:r>
-              <a:rPr lang="en-US" sz="1000" dirty="0">
+            <a:pPr marL="0" indent="0" algn="ctr">
+              <a:buNone/>
+            </a:pPr>
+            <a:r>
+              <a:rPr lang="en-US" sz="1200" dirty="0">
                 <a:solidFill>
                   <a:srgbClr val="64748B"/>
                 </a:solidFill>
@@ -2972,7 +2594,7 @@
               </a:rPr>
               <a:t>fire_images</a:t>
             </a:r>
-            <a:endParaRPr lang="en-US" sz="1000" dirty="0"/>
+            <a:endParaRPr lang="en-US" sz="1200" dirty="0"/>
           </a:p>
         </p:txBody>
       </p:sp>
@@ -2997,11 +2619,11 @@
           <a:bodyPr wrap="square" rtlCol="0" anchor="ctr"/>
           <a:lstStyle/>
           <a:p>
-            <a:pPr algn="ctr" indent="0" marL="0">
-              <a:buNone/>
-            </a:pPr>
-            <a:r>
-              <a:rPr lang="en-US" sz="1000" dirty="0">
+            <a:pPr marL="0" indent="0" algn="ctr">
+              <a:buNone/>
+            </a:pPr>
+            <a:r>
+              <a:rPr lang="en-US" sz="1200" dirty="0">
                 <a:solidFill>
                   <a:srgbClr val="64748B"/>
                 </a:solidFill>
@@ -3011,7 +2633,7 @@
               </a:rPr>
               <a:t>non_fire_images</a:t>
             </a:r>
-            <a:endParaRPr lang="en-US" sz="1000" dirty="0"/>
+            <a:endParaRPr lang="en-US" sz="1200" dirty="0"/>
           </a:p>
         </p:txBody>
       </p:sp>
@@ -3036,11 +2658,11 @@
           <a:bodyPr wrap="square" rtlCol="0" anchor="ctr"/>
           <a:lstStyle/>
           <a:p>
-            <a:pPr algn="ctr" indent="0" marL="0">
-              <a:buNone/>
-            </a:pPr>
-            <a:r>
-              <a:rPr lang="en-US" sz="1000" dirty="0">
+            <a:pPr marL="0" indent="0" algn="ctr">
+              <a:buNone/>
+            </a:pPr>
+            <a:r>
+              <a:rPr lang="en-US" sz="1200" dirty="0">
                 <a:solidFill>
                   <a:srgbClr val="64748B"/>
                 </a:solidFill>
@@ -3050,7 +2672,7 @@
               </a:rPr>
               <a:t>~1 200 images</a:t>
             </a:r>
-            <a:endParaRPr lang="en-US" sz="1000" dirty="0"/>
+            <a:endParaRPr lang="en-US" sz="1200" dirty="0"/>
           </a:p>
         </p:txBody>
       </p:sp>
@@ -3075,7 +2697,7 @@
           <a:bodyPr wrap="square" rtlCol="0" anchor="ctr"/>
           <a:lstStyle/>
           <a:p>
-            <a:pPr algn="ctr" indent="0" marL="0">
+            <a:pPr marL="0" indent="0" algn="ctr">
               <a:buNone/>
             </a:pPr>
             <a:r>
@@ -3114,7 +2736,7 @@
             <a:prstDash val="solid"/>
           </a:ln>
           <a:effectLst>
-            <a:outerShdw sx="100000" sy="100000" kx="0" ky="0" algn="bl" rotWithShape="0" blurRad="76200" dist="25400" dir="8100000">
+            <a:outerShdw blurRad="76200" dist="25400" dir="8100000" algn="bl" rotWithShape="0">
               <a:srgbClr val="000000">
                 <a:alpha val="7000"/>
               </a:srgbClr>
@@ -3168,7 +2790,7 @@
           <a:bodyPr wrap="square" rtlCol="0" anchor="ctr"/>
           <a:lstStyle/>
           <a:p>
-            <a:pPr algn="ctr" indent="0" marL="0">
+            <a:pPr marL="0" indent="0" algn="ctr">
               <a:buNone/>
             </a:pPr>
             <a:r>
@@ -3207,7 +2829,7 @@
           <a:bodyPr wrap="square" rtlCol="0" anchor="ctr"/>
           <a:lstStyle/>
           <a:p>
-            <a:pPr algn="ctr" indent="0" marL="0">
+            <a:pPr marL="0" indent="0" algn="ctr">
               <a:buNone/>
             </a:pPr>
             <a:r>
@@ -3243,11 +2865,11 @@
           <a:bodyPr wrap="square" rtlCol="0" anchor="ctr"/>
           <a:lstStyle/>
           <a:p>
-            <a:pPr algn="ctr" indent="0" marL="0">
-              <a:buNone/>
-            </a:pPr>
-            <a:r>
-              <a:rPr lang="en-US" sz="1200" b="1" dirty="0">
+            <a:pPr marL="0" indent="0" algn="ctr">
+              <a:buNone/>
+            </a:pPr>
+            <a:r>
+              <a:rPr lang="en-US" sz="1400" b="1" dirty="0">
                 <a:solidFill>
                   <a:srgbClr val="1E40AF"/>
                 </a:solidFill>
@@ -3257,7 +2879,7 @@
               </a:rPr>
               <a:t>Prétraitement</a:t>
             </a:r>
-            <a:endParaRPr lang="en-US" sz="1200" dirty="0"/>
+            <a:endParaRPr lang="en-US" sz="1400" dirty="0"/>
           </a:p>
         </p:txBody>
       </p:sp>
@@ -3282,11 +2904,11 @@
           <a:bodyPr wrap="square" rtlCol="0" anchor="ctr"/>
           <a:lstStyle/>
           <a:p>
-            <a:pPr algn="ctr" indent="0" marL="0">
-              <a:buNone/>
-            </a:pPr>
-            <a:r>
-              <a:rPr lang="en-US" sz="1000" dirty="0">
+            <a:pPr marL="0" indent="0" algn="ctr">
+              <a:buNone/>
+            </a:pPr>
+            <a:r>
+              <a:rPr lang="en-US" sz="1200" dirty="0">
                 <a:solidFill>
                   <a:srgbClr val="64748B"/>
                 </a:solidFill>
@@ -3296,7 +2918,7 @@
               </a:rPr>
               <a:t>Resize 224×224</a:t>
             </a:r>
-            <a:endParaRPr lang="en-US" sz="1000" dirty="0"/>
+            <a:endParaRPr lang="en-US" sz="1200" dirty="0"/>
           </a:p>
         </p:txBody>
       </p:sp>
@@ -3321,11 +2943,11 @@
           <a:bodyPr wrap="square" rtlCol="0" anchor="ctr"/>
           <a:lstStyle/>
           <a:p>
-            <a:pPr algn="ctr" indent="0" marL="0">
-              <a:buNone/>
-            </a:pPr>
-            <a:r>
-              <a:rPr lang="en-US" sz="1000" dirty="0">
+            <a:pPr marL="0" indent="0" algn="ctr">
+              <a:buNone/>
+            </a:pPr>
+            <a:r>
+              <a:rPr lang="en-US" sz="1200" dirty="0">
                 <a:solidFill>
                   <a:srgbClr val="64748B"/>
                 </a:solidFill>
@@ -3335,7 +2957,7 @@
               </a:rPr>
               <a:t>Normalize ImageNet</a:t>
             </a:r>
-            <a:endParaRPr lang="en-US" sz="1000" dirty="0"/>
+            <a:endParaRPr lang="en-US" sz="1200" dirty="0"/>
           </a:p>
         </p:txBody>
       </p:sp>
@@ -3360,11 +2982,11 @@
           <a:bodyPr wrap="square" rtlCol="0" anchor="ctr"/>
           <a:lstStyle/>
           <a:p>
-            <a:pPr algn="ctr" indent="0" marL="0">
-              <a:buNone/>
-            </a:pPr>
-            <a:r>
-              <a:rPr lang="en-US" sz="1000" dirty="0">
+            <a:pPr marL="0" indent="0" algn="ctr">
+              <a:buNone/>
+            </a:pPr>
+            <a:r>
+              <a:rPr lang="en-US" sz="1200" dirty="0">
                 <a:solidFill>
                   <a:srgbClr val="64748B"/>
                 </a:solidFill>
@@ -3374,7 +2996,7 @@
               </a:rPr>
               <a:t>Split 80 / 20</a:t>
             </a:r>
-            <a:endParaRPr lang="en-US" sz="1000" dirty="0"/>
+            <a:endParaRPr lang="en-US" sz="1200" dirty="0"/>
           </a:p>
         </p:txBody>
       </p:sp>
@@ -3399,7 +3021,7 @@
           <a:bodyPr wrap="square" rtlCol="0" anchor="ctr"/>
           <a:lstStyle/>
           <a:p>
-            <a:pPr algn="ctr" indent="0" marL="0">
+            <a:pPr marL="0" indent="0" algn="ctr">
               <a:buNone/>
             </a:pPr>
             <a:r>
@@ -3438,7 +3060,7 @@
             <a:prstDash val="solid"/>
           </a:ln>
           <a:effectLst>
-            <a:outerShdw sx="100000" sy="100000" kx="0" ky="0" algn="bl" rotWithShape="0" blurRad="76200" dist="25400" dir="8100000">
+            <a:outerShdw blurRad="76200" dist="25400" dir="8100000" algn="bl" rotWithShape="0">
               <a:srgbClr val="000000">
                 <a:alpha val="7000"/>
               </a:srgbClr>
@@ -3492,7 +3114,7 @@
           <a:bodyPr wrap="square" rtlCol="0" anchor="ctr"/>
           <a:lstStyle/>
           <a:p>
-            <a:pPr algn="ctr" indent="0" marL="0">
+            <a:pPr marL="0" indent="0" algn="ctr">
               <a:buNone/>
             </a:pPr>
             <a:r>
@@ -3531,7 +3153,7 @@
           <a:bodyPr wrap="square" rtlCol="0" anchor="ctr"/>
           <a:lstStyle/>
           <a:p>
-            <a:pPr algn="ctr" indent="0" marL="0">
+            <a:pPr marL="0" indent="0" algn="ctr">
               <a:buNone/>
             </a:pPr>
             <a:r>
@@ -3567,11 +3189,11 @@
           <a:bodyPr wrap="square" rtlCol="0" anchor="ctr"/>
           <a:lstStyle/>
           <a:p>
-            <a:pPr algn="ctr" indent="0" marL="0">
-              <a:buNone/>
-            </a:pPr>
-            <a:r>
-              <a:rPr lang="en-US" sz="1200" b="1" dirty="0">
+            <a:pPr marL="0" indent="0" algn="ctr">
+              <a:buNone/>
+            </a:pPr>
+            <a:r>
+              <a:rPr lang="en-US" sz="1400" b="1" dirty="0">
                 <a:solidFill>
                   <a:srgbClr val="1E40AF"/>
                 </a:solidFill>
@@ -3581,7 +3203,7 @@
               </a:rPr>
               <a:t>Augmentation</a:t>
             </a:r>
-            <a:endParaRPr lang="en-US" sz="1200" dirty="0"/>
+            <a:endParaRPr lang="en-US" sz="1400" dirty="0"/>
           </a:p>
         </p:txBody>
       </p:sp>
@@ -3606,11 +3228,11 @@
           <a:bodyPr wrap="square" rtlCol="0" anchor="ctr"/>
           <a:lstStyle/>
           <a:p>
-            <a:pPr algn="ctr" indent="0" marL="0">
-              <a:buNone/>
-            </a:pPr>
-            <a:r>
-              <a:rPr lang="en-US" sz="1000" dirty="0">
+            <a:pPr marL="0" indent="0" algn="ctr">
+              <a:buNone/>
+            </a:pPr>
+            <a:r>
+              <a:rPr lang="en-US" sz="1200" dirty="0">
                 <a:solidFill>
                   <a:srgbClr val="64748B"/>
                 </a:solidFill>
@@ -3620,7 +3242,7 @@
               </a:rPr>
               <a:t>Flip H/V · Rotation</a:t>
             </a:r>
-            <a:endParaRPr lang="en-US" sz="1000" dirty="0"/>
+            <a:endParaRPr lang="en-US" sz="1200" dirty="0"/>
           </a:p>
         </p:txBody>
       </p:sp>
@@ -3645,11 +3267,11 @@
           <a:bodyPr wrap="square" rtlCol="0" anchor="ctr"/>
           <a:lstStyle/>
           <a:p>
-            <a:pPr algn="ctr" indent="0" marL="0">
-              <a:buNone/>
-            </a:pPr>
-            <a:r>
-              <a:rPr lang="en-US" sz="1000" dirty="0">
+            <a:pPr marL="0" indent="0" algn="ctr">
+              <a:buNone/>
+            </a:pPr>
+            <a:r>
+              <a:rPr lang="en-US" sz="1200" dirty="0">
                 <a:solidFill>
                   <a:srgbClr val="64748B"/>
                 </a:solidFill>
@@ -3659,7 +3281,7 @@
               </a:rPr>
               <a:t>ColorJitter</a:t>
             </a:r>
-            <a:endParaRPr lang="en-US" sz="1000" dirty="0"/>
+            <a:endParaRPr lang="en-US" sz="1200" dirty="0"/>
           </a:p>
         </p:txBody>
       </p:sp>
@@ -3684,11 +3306,11 @@
           <a:bodyPr wrap="square" rtlCol="0" anchor="ctr"/>
           <a:lstStyle/>
           <a:p>
-            <a:pPr algn="ctr" indent="0" marL="0">
-              <a:buNone/>
-            </a:pPr>
-            <a:r>
-              <a:rPr lang="en-US" sz="1000" dirty="0">
+            <a:pPr marL="0" indent="0" algn="ctr">
+              <a:buNone/>
+            </a:pPr>
+            <a:r>
+              <a:rPr lang="en-US" sz="1200" dirty="0">
                 <a:solidFill>
                   <a:srgbClr val="64748B"/>
                 </a:solidFill>
@@ -3698,7 +3320,7 @@
               </a:rPr>
               <a:t>GaussianBlur</a:t>
             </a:r>
-            <a:endParaRPr lang="en-US" sz="1000" dirty="0"/>
+            <a:endParaRPr lang="en-US" sz="1200" dirty="0"/>
           </a:p>
         </p:txBody>
       </p:sp>
@@ -3723,7 +3345,7 @@
           <a:bodyPr wrap="square" rtlCol="0" anchor="ctr"/>
           <a:lstStyle/>
           <a:p>
-            <a:pPr algn="ctr" indent="0" marL="0">
+            <a:pPr marL="0" indent="0" algn="ctr">
               <a:buNone/>
             </a:pPr>
             <a:r>
@@ -3762,7 +3384,7 @@
             <a:prstDash val="solid"/>
           </a:ln>
           <a:effectLst>
-            <a:outerShdw sx="100000" sy="100000" kx="0" ky="0" algn="bl" rotWithShape="0" blurRad="76200" dist="25400" dir="8100000">
+            <a:outerShdw blurRad="76200" dist="25400" dir="8100000" algn="bl" rotWithShape="0">
               <a:srgbClr val="000000">
                 <a:alpha val="7000"/>
               </a:srgbClr>
@@ -3816,7 +3438,7 @@
           <a:bodyPr wrap="square" rtlCol="0" anchor="ctr"/>
           <a:lstStyle/>
           <a:p>
-            <a:pPr algn="ctr" indent="0" marL="0">
+            <a:pPr marL="0" indent="0" algn="ctr">
               <a:buNone/>
             </a:pPr>
             <a:r>
@@ -3855,7 +3477,7 @@
           <a:bodyPr wrap="square" rtlCol="0" anchor="ctr"/>
           <a:lstStyle/>
           <a:p>
-            <a:pPr algn="ctr" indent="0" marL="0">
+            <a:pPr marL="0" indent="0" algn="ctr">
               <a:buNone/>
             </a:pPr>
             <a:r>
@@ -3891,11 +3513,11 @@
           <a:bodyPr wrap="square" rtlCol="0" anchor="ctr"/>
           <a:lstStyle/>
           <a:p>
-            <a:pPr algn="ctr" indent="0" marL="0">
-              <a:buNone/>
-            </a:pPr>
-            <a:r>
-              <a:rPr lang="en-US" sz="1200" b="1" dirty="0">
+            <a:pPr marL="0" indent="0" algn="ctr">
+              <a:buNone/>
+            </a:pPr>
+            <a:r>
+              <a:rPr lang="en-US" sz="1400" b="1" dirty="0">
                 <a:solidFill>
                   <a:srgbClr val="1E40AF"/>
                 </a:solidFill>
@@ -3905,7 +3527,7 @@
               </a:rPr>
               <a:t>Modèle</a:t>
             </a:r>
-            <a:endParaRPr lang="en-US" sz="1200" dirty="0"/>
+            <a:endParaRPr lang="en-US" sz="1400" dirty="0"/>
           </a:p>
         </p:txBody>
       </p:sp>
@@ -3930,11 +3552,11 @@
           <a:bodyPr wrap="square" rtlCol="0" anchor="ctr"/>
           <a:lstStyle/>
           <a:p>
-            <a:pPr algn="ctr" indent="0" marL="0">
-              <a:buNone/>
-            </a:pPr>
-            <a:r>
-              <a:rPr lang="en-US" sz="1000" dirty="0">
+            <a:pPr marL="0" indent="0" algn="ctr">
+              <a:buNone/>
+            </a:pPr>
+            <a:r>
+              <a:rPr lang="en-US" sz="1200" dirty="0">
                 <a:solidFill>
                   <a:srgbClr val="64748B"/>
                 </a:solidFill>
@@ -3944,7 +3566,7 @@
               </a:rPr>
               <a:t>SimpleCNN</a:t>
             </a:r>
-            <a:endParaRPr lang="en-US" sz="1000" dirty="0"/>
+            <a:endParaRPr lang="en-US" sz="1200" dirty="0"/>
           </a:p>
         </p:txBody>
       </p:sp>
@@ -3969,11 +3591,11 @@
           <a:bodyPr wrap="square" rtlCol="0" anchor="ctr"/>
           <a:lstStyle/>
           <a:p>
-            <a:pPr algn="ctr" indent="0" marL="0">
-              <a:buNone/>
-            </a:pPr>
-            <a:r>
-              <a:rPr lang="en-US" sz="1000" dirty="0">
+            <a:pPr marL="0" indent="0" algn="ctr">
+              <a:buNone/>
+            </a:pPr>
+            <a:r>
+              <a:rPr lang="en-US" sz="1200" dirty="0">
                 <a:solidFill>
                   <a:srgbClr val="64748B"/>
                 </a:solidFill>
@@ -3983,7 +3605,7 @@
               </a:rPr>
               <a:t>ResNet-50</a:t>
             </a:r>
-            <a:endParaRPr lang="en-US" sz="1000" dirty="0"/>
+            <a:endParaRPr lang="en-US" sz="1200" dirty="0"/>
           </a:p>
         </p:txBody>
       </p:sp>
@@ -4008,11 +3630,11 @@
           <a:bodyPr wrap="square" rtlCol="0" anchor="ctr"/>
           <a:lstStyle/>
           <a:p>
-            <a:pPr algn="ctr" indent="0" marL="0">
-              <a:buNone/>
-            </a:pPr>
-            <a:r>
-              <a:rPr lang="en-US" sz="1000" dirty="0">
+            <a:pPr marL="0" indent="0" algn="ctr">
+              <a:buNone/>
+            </a:pPr>
+            <a:r>
+              <a:rPr lang="en-US" sz="1200" dirty="0">
                 <a:solidFill>
                   <a:srgbClr val="64748B"/>
                 </a:solidFill>
@@ -4022,7 +3644,7 @@
               </a:rPr>
               <a:t>EfficientNet-B0</a:t>
             </a:r>
-            <a:endParaRPr lang="en-US" sz="1000" dirty="0"/>
+            <a:endParaRPr lang="en-US" sz="1200" dirty="0"/>
           </a:p>
         </p:txBody>
       </p:sp>
@@ -4047,7 +3669,7 @@
           <a:bodyPr wrap="square" rtlCol="0" anchor="ctr"/>
           <a:lstStyle/>
           <a:p>
-            <a:pPr algn="ctr" indent="0" marL="0">
+            <a:pPr marL="0" indent="0" algn="ctr">
               <a:buNone/>
             </a:pPr>
             <a:r>
@@ -4086,7 +3708,7 @@
             <a:prstDash val="solid"/>
           </a:ln>
           <a:effectLst>
-            <a:outerShdw sx="100000" sy="100000" kx="0" ky="0" algn="bl" rotWithShape="0" blurRad="76200" dist="25400" dir="8100000">
+            <a:outerShdw blurRad="76200" dist="25400" dir="8100000" algn="bl" rotWithShape="0">
               <a:srgbClr val="000000">
                 <a:alpha val="7000"/>
               </a:srgbClr>
@@ -4140,7 +3762,7 @@
           <a:bodyPr wrap="square" rtlCol="0" anchor="ctr"/>
           <a:lstStyle/>
           <a:p>
-            <a:pPr algn="ctr" indent="0" marL="0">
+            <a:pPr marL="0" indent="0" algn="ctr">
               <a:buNone/>
             </a:pPr>
             <a:r>
@@ -4179,7 +3801,7 @@
           <a:bodyPr wrap="square" rtlCol="0" anchor="ctr"/>
           <a:lstStyle/>
           <a:p>
-            <a:pPr algn="ctr" indent="0" marL="0">
+            <a:pPr marL="0" indent="0" algn="ctr">
               <a:buNone/>
             </a:pPr>
             <a:r>
@@ -4215,11 +3837,11 @@
           <a:bodyPr wrap="square" rtlCol="0" anchor="ctr"/>
           <a:lstStyle/>
           <a:p>
-            <a:pPr algn="ctr" indent="0" marL="0">
-              <a:buNone/>
-            </a:pPr>
-            <a:r>
-              <a:rPr lang="en-US" sz="1200" b="1" dirty="0">
+            <a:pPr marL="0" indent="0" algn="ctr">
+              <a:buNone/>
+            </a:pPr>
+            <a:r>
+              <a:rPr lang="en-US" sz="1400" b="1" dirty="0">
                 <a:solidFill>
                   <a:srgbClr val="1E40AF"/>
                 </a:solidFill>
@@ -4229,7 +3851,7 @@
               </a:rPr>
               <a:t>Évaluation</a:t>
             </a:r>
-            <a:endParaRPr lang="en-US" sz="1200" dirty="0"/>
+            <a:endParaRPr lang="en-US" sz="1400" dirty="0"/>
           </a:p>
         </p:txBody>
       </p:sp>
@@ -4254,11 +3876,11 @@
           <a:bodyPr wrap="square" rtlCol="0" anchor="ctr"/>
           <a:lstStyle/>
           <a:p>
-            <a:pPr algn="ctr" indent="0" marL="0">
-              <a:buNone/>
-            </a:pPr>
-            <a:r>
-              <a:rPr lang="en-US" sz="1000" dirty="0">
+            <a:pPr marL="0" indent="0" algn="ctr">
+              <a:buNone/>
+            </a:pPr>
+            <a:r>
+              <a:rPr lang="en-US" sz="1200" dirty="0">
                 <a:solidFill>
                   <a:srgbClr val="64748B"/>
                 </a:solidFill>
@@ -4268,7 +3890,7 @@
               </a:rPr>
               <a:t>Accuracy · Loss</a:t>
             </a:r>
-            <a:endParaRPr lang="en-US" sz="1000" dirty="0"/>
+            <a:endParaRPr lang="en-US" sz="1200" dirty="0"/>
           </a:p>
         </p:txBody>
       </p:sp>
@@ -4293,11 +3915,11 @@
           <a:bodyPr wrap="square" rtlCol="0" anchor="ctr"/>
           <a:lstStyle/>
           <a:p>
-            <a:pPr algn="ctr" indent="0" marL="0">
-              <a:buNone/>
-            </a:pPr>
-            <a:r>
-              <a:rPr lang="en-US" sz="1000" dirty="0">
+            <a:pPr marL="0" indent="0" algn="ctr">
+              <a:buNone/>
+            </a:pPr>
+            <a:r>
+              <a:rPr lang="en-US" sz="1200" dirty="0">
                 <a:solidFill>
                   <a:srgbClr val="64748B"/>
                 </a:solidFill>
@@ -4307,7 +3929,7 @@
               </a:rPr>
               <a:t>ROC · Confusion</a:t>
             </a:r>
-            <a:endParaRPr lang="en-US" sz="1000" dirty="0"/>
+            <a:endParaRPr lang="en-US" sz="1200" dirty="0"/>
           </a:p>
         </p:txBody>
       </p:sp>
@@ -4332,11 +3954,11 @@
           <a:bodyPr wrap="square" rtlCol="0" anchor="ctr"/>
           <a:lstStyle/>
           <a:p>
-            <a:pPr algn="ctr" indent="0" marL="0">
-              <a:buNone/>
-            </a:pPr>
-            <a:r>
-              <a:rPr lang="en-US" sz="1000" dirty="0">
+            <a:pPr marL="0" indent="0" algn="ctr">
+              <a:buNone/>
+            </a:pPr>
+            <a:r>
+              <a:rPr lang="en-US" sz="1200" dirty="0">
                 <a:solidFill>
                   <a:srgbClr val="64748B"/>
                 </a:solidFill>
@@ -4346,7 +3968,7 @@
               </a:rPr>
               <a:t>Grad-CAM</a:t>
             </a:r>
-            <a:endParaRPr lang="en-US" sz="1000" dirty="0"/>
+            <a:endParaRPr lang="en-US" sz="1200" dirty="0"/>
           </a:p>
         </p:txBody>
       </p:sp>
@@ -4366,6 +3988,7 @@
         <a:solidFill>
           <a:srgbClr val="FFFFFF"/>
         </a:solidFill>
+        <a:effectLst/>
       </p:bgPr>
     </p:bg>
     <p:spTree>
@@ -4384,31 +4007,6 @@
       </p:grpSpPr>
       <p:sp>
         <p:nvSpPr>
-          <p:cNvPr id="2" name="Shape 0"/>
-          <p:cNvSpPr/>
-          <p:nvPr/>
-        </p:nvSpPr>
-        <p:spPr>
-          <a:xfrm>
-            <a:off x="320040" y="201168"/>
-            <a:ext cx="64008" cy="502920"/>
-          </a:xfrm>
-          <a:prstGeom prst="rect">
-            <a:avLst/>
-          </a:prstGeom>
-          <a:solidFill>
-            <a:srgbClr val="1E40AF"/>
-          </a:solidFill>
-          <a:ln w="12700">
-            <a:solidFill>
-              <a:srgbClr val="1E40AF"/>
-            </a:solidFill>
-            <a:prstDash val="solid"/>
-          </a:ln>
-        </p:spPr>
-      </p:sp>
-      <p:sp>
-        <p:nvSpPr>
           <p:cNvPr id="3" name="Text 1"/>
           <p:cNvSpPr/>
           <p:nvPr/>
@@ -4428,7 +4026,7 @@
           <a:bodyPr wrap="square" lIns="0" tIns="0" rIns="0" bIns="0" rtlCol="0" anchor="ctr"/>
           <a:lstStyle/>
           <a:p>
-            <a:pPr indent="0" marL="0">
+            <a:pPr marL="0" indent="0">
               <a:buNone/>
             </a:pPr>
             <a:r>
@@ -4438,50 +4036,13 @@
                 </a:solidFill>
                 <a:latin typeface="Calibri" pitchFamily="34" charset="0"/>
                 <a:ea typeface="Calibri" pitchFamily="34" charset="-122"/>
-                <a:cs typeface="Calibri" pitchFamily="34" charset="-120"/>
+                <a:cs typeface="+mj-cs"/>
               </a:rPr>
               <a:t>Architectures comparées</a:t>
             </a:r>
-            <a:endParaRPr lang="en-US" sz="2600" dirty="0"/>
-          </a:p>
-        </p:txBody>
-      </p:sp>
-      <p:sp>
-        <p:nvSpPr>
-          <p:cNvPr id="4" name="Text 2"/>
-          <p:cNvSpPr/>
-          <p:nvPr/>
-        </p:nvSpPr>
-        <p:spPr>
-          <a:xfrm>
-            <a:off x="475488" y="694944"/>
-            <a:ext cx="8229600" cy="256032"/>
-          </a:xfrm>
-          <a:prstGeom prst="rect">
-            <a:avLst/>
-          </a:prstGeom>
-          <a:noFill/>
-          <a:ln/>
-        </p:spPr>
-        <p:txBody>
-          <a:bodyPr wrap="square" lIns="0" tIns="0" rIns="0" bIns="0" rtlCol="0" anchor="ctr"/>
-          <a:lstStyle/>
-          <a:p>
-            <a:pPr indent="0" marL="0">
-              <a:buNone/>
-            </a:pPr>
-            <a:r>
-              <a:rPr lang="en-US" sz="1200" i="1" dirty="0">
-                <a:solidFill>
-                  <a:srgbClr val="64748B"/>
-                </a:solidFill>
-                <a:latin typeface="Calibri" pitchFamily="34" charset="0"/>
-                <a:ea typeface="Calibri" pitchFamily="34" charset="-122"/>
-                <a:cs typeface="Calibri" pitchFamily="34" charset="-120"/>
-              </a:rPr>
-              <a:t>Trois approches de complexité croissante</a:t>
-            </a:r>
-            <a:endParaRPr lang="en-US" sz="1200" dirty="0"/>
+            <a:endParaRPr lang="en-US" sz="2600" dirty="0">
+              <a:cs typeface="+mj-cs"/>
+            </a:endParaRPr>
           </a:p>
         </p:txBody>
       </p:sp>
@@ -4534,7 +4095,7 @@
             <a:prstDash val="solid"/>
           </a:ln>
           <a:effectLst>
-            <a:outerShdw sx="100000" sy="100000" kx="0" ky="0" algn="bl" rotWithShape="0" blurRad="63500" dist="25400" dir="8100000">
+            <a:outerShdw blurRad="63500" dist="25400" dir="8100000" algn="bl" rotWithShape="0">
               <a:srgbClr val="000000">
                 <a:alpha val="6000"/>
               </a:srgbClr>
@@ -4588,7 +4149,7 @@
           <a:bodyPr wrap="square" rtlCol="0" anchor="ctr"/>
           <a:lstStyle/>
           <a:p>
-            <a:pPr algn="ctr" indent="0" marL="0">
+            <a:pPr marL="0" indent="0" algn="ctr">
               <a:buNone/>
             </a:pPr>
             <a:r>
@@ -4598,11 +4159,13 @@
                 </a:solidFill>
                 <a:latin typeface="Calibri" pitchFamily="34" charset="0"/>
                 <a:ea typeface="Calibri" pitchFamily="34" charset="-122"/>
-                <a:cs typeface="Calibri" pitchFamily="34" charset="-120"/>
+                <a:cs typeface="+mj-cs"/>
               </a:rPr>
               <a:t>SimpleCNN</a:t>
             </a:r>
-            <a:endParaRPr lang="en-US" sz="1500" dirty="0"/>
+            <a:endParaRPr lang="en-US" sz="1500" dirty="0">
+              <a:cs typeface="+mj-cs"/>
+            </a:endParaRPr>
           </a:p>
         </p:txBody>
       </p:sp>
@@ -4627,21 +4190,23 @@
           <a:bodyPr wrap="square" rtlCol="0" anchor="ctr"/>
           <a:lstStyle/>
           <a:p>
-            <a:pPr algn="ctr" indent="0" marL="0">
-              <a:buNone/>
-            </a:pPr>
-            <a:r>
-              <a:rPr lang="en-US" sz="1200" b="1" dirty="0">
+            <a:pPr marL="0" indent="0" algn="ctr">
+              <a:buNone/>
+            </a:pPr>
+            <a:r>
+              <a:rPr lang="en-US" sz="1400" b="1" dirty="0">
                 <a:solidFill>
                   <a:srgbClr val="3B82F6"/>
                 </a:solidFill>
                 <a:latin typeface="Calibri" pitchFamily="34" charset="0"/>
                 <a:ea typeface="Calibri" pitchFamily="34" charset="-122"/>
-                <a:cs typeface="Calibri" pitchFamily="34" charset="-120"/>
+                <a:cs typeface="+mj-cs"/>
               </a:rPr>
               <a:t>From scratch</a:t>
             </a:r>
-            <a:endParaRPr lang="en-US" sz="1200" dirty="0"/>
+            <a:endParaRPr lang="en-US" sz="1400" dirty="0">
+              <a:cs typeface="+mj-cs"/>
+            </a:endParaRPr>
           </a:p>
         </p:txBody>
       </p:sp>
@@ -4666,9 +4231,20 @@
           <a:bodyPr wrap="square" rtlCol="0" anchor="ctr"/>
           <a:lstStyle/>
           <a:p>
-            <a:pPr algn="ctr" indent="0" marL="0">
-              <a:buNone/>
-            </a:pPr>
+            <a:pPr marL="0" indent="0" algn="ctr">
+              <a:buNone/>
+            </a:pPr>
+            <a:r>
+              <a:rPr lang="en-US" sz="1100" dirty="0" smtClean="0">
+                <a:solidFill>
+                  <a:srgbClr val="64748B"/>
+                </a:solidFill>
+                <a:latin typeface="Calibri" pitchFamily="34" charset="0"/>
+                <a:ea typeface="Calibri" pitchFamily="34" charset="-122"/>
+                <a:cs typeface="+mj-cs"/>
+              </a:rPr>
+              <a:t>500 </a:t>
+            </a:r>
             <a:r>
               <a:rPr lang="en-US" sz="1100" dirty="0">
                 <a:solidFill>
@@ -4676,11 +4252,13 @@
                 </a:solidFill>
                 <a:latin typeface="Calibri" pitchFamily="34" charset="0"/>
                 <a:ea typeface="Calibri" pitchFamily="34" charset="-122"/>
-                <a:cs typeface="Calibri" pitchFamily="34" charset="-120"/>
-              </a:rPr>
-              <a:t>~500 K paramètres</a:t>
-            </a:r>
-            <a:endParaRPr lang="en-US" sz="1100" dirty="0"/>
+                <a:cs typeface="+mj-cs"/>
+              </a:rPr>
+              <a:t>K paramètres</a:t>
+            </a:r>
+            <a:endParaRPr lang="en-US" sz="1100" dirty="0">
+              <a:cs typeface="+mj-cs"/>
+            </a:endParaRPr>
           </a:p>
         </p:txBody>
       </p:sp>
@@ -4730,21 +4308,23 @@
           <a:bodyPr wrap="square" rtlCol="0" anchor="ctr"/>
           <a:lstStyle/>
           <a:p>
-            <a:pPr indent="0" marL="0">
-              <a:buNone/>
-            </a:pPr>
-            <a:r>
-              <a:rPr lang="en-US" sz="1100" dirty="0">
+            <a:pPr marL="0" indent="0">
+              <a:buNone/>
+            </a:pPr>
+            <a:r>
+              <a:rPr lang="en-US" sz="1200" dirty="0">
                 <a:solidFill>
                   <a:srgbClr val="1E293B"/>
                 </a:solidFill>
                 <a:latin typeface="Calibri" pitchFamily="34" charset="0"/>
                 <a:ea typeface="Calibri" pitchFamily="34" charset="-122"/>
-                <a:cs typeface="Calibri" pitchFamily="34" charset="-120"/>
+                <a:cs typeface="+mj-cs"/>
               </a:rPr>
               <a:t>• 4 blocs Conv + BN + ReLU</a:t>
             </a:r>
-            <a:endParaRPr lang="en-US" sz="1100" dirty="0"/>
+            <a:endParaRPr lang="en-US" sz="1200" dirty="0">
+              <a:cs typeface="+mj-cs"/>
+            </a:endParaRPr>
           </a:p>
         </p:txBody>
       </p:sp>
@@ -4769,21 +4349,23 @@
           <a:bodyPr wrap="square" rtlCol="0" anchor="ctr"/>
           <a:lstStyle/>
           <a:p>
-            <a:pPr indent="0" marL="0">
-              <a:buNone/>
-            </a:pPr>
-            <a:r>
-              <a:rPr lang="en-US" sz="1100" dirty="0">
+            <a:pPr marL="0" indent="0">
+              <a:buNone/>
+            </a:pPr>
+            <a:r>
+              <a:rPr lang="en-US" sz="1200" dirty="0">
                 <a:solidFill>
                   <a:srgbClr val="1E293B"/>
                 </a:solidFill>
                 <a:latin typeface="Calibri" pitchFamily="34" charset="0"/>
                 <a:ea typeface="Calibri" pitchFamily="34" charset="-122"/>
-                <a:cs typeface="Calibri" pitchFamily="34" charset="-120"/>
+                <a:cs typeface="+mj-cs"/>
               </a:rPr>
               <a:t>• MaxPool + Dropout</a:t>
             </a:r>
-            <a:endParaRPr lang="en-US" sz="1100" dirty="0"/>
+            <a:endParaRPr lang="en-US" sz="1200" dirty="0">
+              <a:cs typeface="+mj-cs"/>
+            </a:endParaRPr>
           </a:p>
         </p:txBody>
       </p:sp>
@@ -4808,21 +4390,23 @@
           <a:bodyPr wrap="square" rtlCol="0" anchor="ctr"/>
           <a:lstStyle/>
           <a:p>
-            <a:pPr indent="0" marL="0">
-              <a:buNone/>
-            </a:pPr>
-            <a:r>
-              <a:rPr lang="en-US" sz="1100" dirty="0">
+            <a:pPr marL="0" indent="0">
+              <a:buNone/>
+            </a:pPr>
+            <a:r>
+              <a:rPr lang="en-US" sz="1200" dirty="0">
                 <a:solidFill>
                   <a:srgbClr val="1E293B"/>
                 </a:solidFill>
                 <a:latin typeface="Calibri" pitchFamily="34" charset="0"/>
                 <a:ea typeface="Calibri" pitchFamily="34" charset="-122"/>
-                <a:cs typeface="Calibri" pitchFamily="34" charset="-120"/>
+                <a:cs typeface="+mj-cs"/>
               </a:rPr>
               <a:t>• AdaptiveAvgPool</a:t>
             </a:r>
-            <a:endParaRPr lang="en-US" sz="1100" dirty="0"/>
+            <a:endParaRPr lang="en-US" sz="1200" dirty="0">
+              <a:cs typeface="+mj-cs"/>
+            </a:endParaRPr>
           </a:p>
         </p:txBody>
       </p:sp>
@@ -4847,21 +4431,23 @@
           <a:bodyPr wrap="square" rtlCol="0" anchor="ctr"/>
           <a:lstStyle/>
           <a:p>
-            <a:pPr indent="0" marL="0">
-              <a:buNone/>
-            </a:pPr>
-            <a:r>
-              <a:rPr lang="en-US" sz="1100" dirty="0">
+            <a:pPr marL="0" indent="0">
+              <a:buNone/>
+            </a:pPr>
+            <a:r>
+              <a:rPr lang="en-US" sz="1200" dirty="0">
                 <a:solidFill>
                   <a:srgbClr val="1E293B"/>
                 </a:solidFill>
                 <a:latin typeface="Calibri" pitchFamily="34" charset="0"/>
                 <a:ea typeface="Calibri" pitchFamily="34" charset="-122"/>
-                <a:cs typeface="Calibri" pitchFamily="34" charset="-120"/>
+                <a:cs typeface="+mj-cs"/>
               </a:rPr>
               <a:t>• Optimiseur : Adam lr=3e-4</a:t>
             </a:r>
-            <a:endParaRPr lang="en-US" sz="1100" dirty="0"/>
+            <a:endParaRPr lang="en-US" sz="1200" dirty="0">
+              <a:cs typeface="+mj-cs"/>
+            </a:endParaRPr>
           </a:p>
         </p:txBody>
       </p:sp>
@@ -4889,7 +4475,7 @@
             <a:prstDash val="solid"/>
           </a:ln>
           <a:effectLst>
-            <a:outerShdw sx="100000" sy="100000" kx="0" ky="0" algn="bl" rotWithShape="0" blurRad="63500" dist="25400" dir="8100000">
+            <a:outerShdw blurRad="63500" dist="25400" dir="8100000" algn="bl" rotWithShape="0">
               <a:srgbClr val="000000">
                 <a:alpha val="6000"/>
               </a:srgbClr>
@@ -4943,7 +4529,7 @@
           <a:bodyPr wrap="square" rtlCol="0" anchor="ctr"/>
           <a:lstStyle/>
           <a:p>
-            <a:pPr algn="ctr" indent="0" marL="0">
+            <a:pPr marL="0" indent="0" algn="ctr">
               <a:buNone/>
             </a:pPr>
             <a:r>
@@ -4953,11 +4539,13 @@
                 </a:solidFill>
                 <a:latin typeface="Calibri" pitchFamily="34" charset="0"/>
                 <a:ea typeface="Calibri" pitchFamily="34" charset="-122"/>
-                <a:cs typeface="Calibri" pitchFamily="34" charset="-120"/>
+                <a:cs typeface="+mj-cs"/>
               </a:rPr>
               <a:t>ResNet-50</a:t>
             </a:r>
-            <a:endParaRPr lang="en-US" sz="1500" dirty="0"/>
+            <a:endParaRPr lang="en-US" sz="1500" dirty="0">
+              <a:cs typeface="+mj-cs"/>
+            </a:endParaRPr>
           </a:p>
         </p:txBody>
       </p:sp>
@@ -4982,21 +4570,23 @@
           <a:bodyPr wrap="square" rtlCol="0" anchor="ctr"/>
           <a:lstStyle/>
           <a:p>
-            <a:pPr algn="ctr" indent="0" marL="0">
-              <a:buNone/>
-            </a:pPr>
-            <a:r>
-              <a:rPr lang="en-US" sz="1200" b="1" dirty="0">
+            <a:pPr marL="0" indent="0" algn="ctr">
+              <a:buNone/>
+            </a:pPr>
+            <a:r>
+              <a:rPr lang="en-US" sz="1400" b="1" dirty="0">
                 <a:solidFill>
                   <a:srgbClr val="0369A1"/>
                 </a:solidFill>
                 <a:latin typeface="Calibri" pitchFamily="34" charset="0"/>
                 <a:ea typeface="Calibri" pitchFamily="34" charset="-122"/>
-                <a:cs typeface="Calibri" pitchFamily="34" charset="-120"/>
+                <a:cs typeface="+mj-cs"/>
               </a:rPr>
               <a:t>Feature extraction</a:t>
             </a:r>
-            <a:endParaRPr lang="en-US" sz="1200" dirty="0"/>
+            <a:endParaRPr lang="en-US" sz="1400" dirty="0">
+              <a:cs typeface="+mj-cs"/>
+            </a:endParaRPr>
           </a:p>
         </p:txBody>
       </p:sp>
@@ -5021,9 +4611,20 @@
           <a:bodyPr wrap="square" rtlCol="0" anchor="ctr"/>
           <a:lstStyle/>
           <a:p>
-            <a:pPr algn="ctr" indent="0" marL="0">
-              <a:buNone/>
-            </a:pPr>
+            <a:pPr marL="0" indent="0" algn="ctr">
+              <a:buNone/>
+            </a:pPr>
+            <a:r>
+              <a:rPr lang="en-US" sz="1100" dirty="0" smtClean="0">
+                <a:solidFill>
+                  <a:srgbClr val="64748B"/>
+                </a:solidFill>
+                <a:latin typeface="Calibri" pitchFamily="34" charset="0"/>
+                <a:ea typeface="Calibri" pitchFamily="34" charset="-122"/>
+                <a:cs typeface="+mj-cs"/>
+              </a:rPr>
+              <a:t>25 </a:t>
+            </a:r>
             <a:r>
               <a:rPr lang="en-US" sz="1100" dirty="0">
                 <a:solidFill>
@@ -5031,11 +4632,13 @@
                 </a:solidFill>
                 <a:latin typeface="Calibri" pitchFamily="34" charset="0"/>
                 <a:ea typeface="Calibri" pitchFamily="34" charset="-122"/>
-                <a:cs typeface="Calibri" pitchFamily="34" charset="-120"/>
-              </a:rPr>
-              <a:t>~25 M (4 K trainables)</a:t>
-            </a:r>
-            <a:endParaRPr lang="en-US" sz="1100" dirty="0"/>
+                <a:cs typeface="+mj-cs"/>
+              </a:rPr>
+              <a:t>M (4 K trainables)</a:t>
+            </a:r>
+            <a:endParaRPr lang="en-US" sz="1100" dirty="0">
+              <a:cs typeface="+mj-cs"/>
+            </a:endParaRPr>
           </a:p>
         </p:txBody>
       </p:sp>
@@ -5085,21 +4688,23 @@
           <a:bodyPr wrap="square" rtlCol="0" anchor="ctr"/>
           <a:lstStyle/>
           <a:p>
-            <a:pPr indent="0" marL="0">
-              <a:buNone/>
-            </a:pPr>
-            <a:r>
-              <a:rPr lang="en-US" sz="1100" dirty="0">
+            <a:pPr marL="0" indent="0">
+              <a:buNone/>
+            </a:pPr>
+            <a:r>
+              <a:rPr lang="en-US" sz="1200" dirty="0">
                 <a:solidFill>
                   <a:srgbClr val="1E293B"/>
                 </a:solidFill>
                 <a:latin typeface="Calibri" pitchFamily="34" charset="0"/>
                 <a:ea typeface="Calibri" pitchFamily="34" charset="-122"/>
-                <a:cs typeface="Calibri" pitchFamily="34" charset="-120"/>
+                <a:cs typeface="+mj-cs"/>
               </a:rPr>
               <a:t>• Backbone ImageNet gelé</a:t>
             </a:r>
-            <a:endParaRPr lang="en-US" sz="1100" dirty="0"/>
+            <a:endParaRPr lang="en-US" sz="1200" dirty="0">
+              <a:cs typeface="+mj-cs"/>
+            </a:endParaRPr>
           </a:p>
         </p:txBody>
       </p:sp>
@@ -5124,21 +4729,23 @@
           <a:bodyPr wrap="square" rtlCol="0" anchor="ctr"/>
           <a:lstStyle/>
           <a:p>
-            <a:pPr indent="0" marL="0">
-              <a:buNone/>
-            </a:pPr>
-            <a:r>
-              <a:rPr lang="en-US" sz="1100" dirty="0">
+            <a:pPr marL="0" indent="0">
+              <a:buNone/>
+            </a:pPr>
+            <a:r>
+              <a:rPr lang="en-US" sz="1200" dirty="0">
                 <a:solidFill>
                   <a:srgbClr val="1E293B"/>
                 </a:solidFill>
                 <a:latin typeface="Calibri" pitchFamily="34" charset="0"/>
                 <a:ea typeface="Calibri" pitchFamily="34" charset="-122"/>
-                <a:cs typeface="Calibri" pitchFamily="34" charset="-120"/>
+                <a:cs typeface="+mj-cs"/>
               </a:rPr>
               <a:t>• Seule la tête fc entraînée</a:t>
             </a:r>
-            <a:endParaRPr lang="en-US" sz="1100" dirty="0"/>
+            <a:endParaRPr lang="en-US" sz="1200" dirty="0">
+              <a:cs typeface="+mj-cs"/>
+            </a:endParaRPr>
           </a:p>
         </p:txBody>
       </p:sp>
@@ -5163,21 +4770,23 @@
           <a:bodyPr wrap="square" rtlCol="0" anchor="ctr"/>
           <a:lstStyle/>
           <a:p>
-            <a:pPr indent="0" marL="0">
-              <a:buNone/>
-            </a:pPr>
-            <a:r>
-              <a:rPr lang="en-US" sz="1100" dirty="0">
+            <a:pPr marL="0" indent="0">
+              <a:buNone/>
+            </a:pPr>
+            <a:r>
+              <a:rPr lang="en-US" sz="1200" dirty="0">
                 <a:solidFill>
                   <a:srgbClr val="1E293B"/>
                 </a:solidFill>
                 <a:latin typeface="Calibri" pitchFamily="34" charset="0"/>
                 <a:ea typeface="Calibri" pitchFamily="34" charset="-122"/>
-                <a:cs typeface="Calibri" pitchFamily="34" charset="-120"/>
+                <a:cs typeface="+mj-cs"/>
               </a:rPr>
               <a:t>• Dropout 0.3</a:t>
             </a:r>
-            <a:endParaRPr lang="en-US" sz="1100" dirty="0"/>
+            <a:endParaRPr lang="en-US" sz="1200" dirty="0">
+              <a:cs typeface="+mj-cs"/>
+            </a:endParaRPr>
           </a:p>
         </p:txBody>
       </p:sp>
@@ -5202,21 +4811,23 @@
           <a:bodyPr wrap="square" rtlCol="0" anchor="ctr"/>
           <a:lstStyle/>
           <a:p>
-            <a:pPr indent="0" marL="0">
-              <a:buNone/>
-            </a:pPr>
-            <a:r>
-              <a:rPr lang="en-US" sz="1100" dirty="0">
+            <a:pPr marL="0" indent="0">
+              <a:buNone/>
+            </a:pPr>
+            <a:r>
+              <a:rPr lang="en-US" sz="1200" dirty="0">
                 <a:solidFill>
                   <a:srgbClr val="1E293B"/>
                 </a:solidFill>
                 <a:latin typeface="Calibri" pitchFamily="34" charset="0"/>
                 <a:ea typeface="Calibri" pitchFamily="34" charset="-122"/>
-                <a:cs typeface="Calibri" pitchFamily="34" charset="-120"/>
+                <a:cs typeface="+mj-cs"/>
               </a:rPr>
               <a:t>• Optimiseur : Adam lr=1e-4</a:t>
             </a:r>
-            <a:endParaRPr lang="en-US" sz="1100" dirty="0"/>
+            <a:endParaRPr lang="en-US" sz="1200" dirty="0">
+              <a:cs typeface="+mj-cs"/>
+            </a:endParaRPr>
           </a:p>
         </p:txBody>
       </p:sp>
@@ -5244,7 +4855,7 @@
             <a:prstDash val="solid"/>
           </a:ln>
           <a:effectLst>
-            <a:outerShdw sx="100000" sy="100000" kx="0" ky="0" algn="bl" rotWithShape="0" blurRad="63500" dist="25400" dir="8100000">
+            <a:outerShdw blurRad="63500" dist="25400" dir="8100000" algn="bl" rotWithShape="0">
               <a:srgbClr val="000000">
                 <a:alpha val="6000"/>
               </a:srgbClr>
@@ -5298,7 +4909,7 @@
           <a:bodyPr wrap="square" rtlCol="0" anchor="ctr"/>
           <a:lstStyle/>
           <a:p>
-            <a:pPr algn="ctr" indent="0" marL="0">
+            <a:pPr marL="0" indent="0" algn="ctr">
               <a:buNone/>
             </a:pPr>
             <a:r>
@@ -5308,11 +4919,13 @@
                 </a:solidFill>
                 <a:latin typeface="Calibri" pitchFamily="34" charset="0"/>
                 <a:ea typeface="Calibri" pitchFamily="34" charset="-122"/>
-                <a:cs typeface="Calibri" pitchFamily="34" charset="-120"/>
+                <a:cs typeface="+mj-cs"/>
               </a:rPr>
               <a:t>EfficientNet-B0</a:t>
             </a:r>
-            <a:endParaRPr lang="en-US" sz="1500" dirty="0"/>
+            <a:endParaRPr lang="en-US" sz="1500" dirty="0">
+              <a:cs typeface="+mj-cs"/>
+            </a:endParaRPr>
           </a:p>
         </p:txBody>
       </p:sp>
@@ -5337,21 +4950,23 @@
           <a:bodyPr wrap="square" rtlCol="0" anchor="ctr"/>
           <a:lstStyle/>
           <a:p>
-            <a:pPr algn="ctr" indent="0" marL="0">
-              <a:buNone/>
-            </a:pPr>
-            <a:r>
-              <a:rPr lang="en-US" sz="1200" b="1" dirty="0">
+            <a:pPr marL="0" indent="0" algn="ctr">
+              <a:buNone/>
+            </a:pPr>
+            <a:r>
+              <a:rPr lang="en-US" sz="1400" b="1" dirty="0">
                 <a:solidFill>
                   <a:srgbClr val="1D4ED8"/>
                 </a:solidFill>
                 <a:latin typeface="Calibri" pitchFamily="34" charset="0"/>
                 <a:ea typeface="Calibri" pitchFamily="34" charset="-122"/>
-                <a:cs typeface="Calibri" pitchFamily="34" charset="-120"/>
+                <a:cs typeface="+mj-cs"/>
               </a:rPr>
               <a:t>Fine-tuning complet</a:t>
             </a:r>
-            <a:endParaRPr lang="en-US" sz="1200" dirty="0"/>
+            <a:endParaRPr lang="en-US" sz="1400" dirty="0">
+              <a:cs typeface="+mj-cs"/>
+            </a:endParaRPr>
           </a:p>
         </p:txBody>
       </p:sp>
@@ -5376,9 +4991,20 @@
           <a:bodyPr wrap="square" rtlCol="0" anchor="ctr"/>
           <a:lstStyle/>
           <a:p>
-            <a:pPr algn="ctr" indent="0" marL="0">
-              <a:buNone/>
-            </a:pPr>
+            <a:pPr marL="0" indent="0" algn="ctr">
+              <a:buNone/>
+            </a:pPr>
+            <a:r>
+              <a:rPr lang="en-US" sz="1100" dirty="0" smtClean="0">
+                <a:solidFill>
+                  <a:srgbClr val="64748B"/>
+                </a:solidFill>
+                <a:latin typeface="Calibri" pitchFamily="34" charset="0"/>
+                <a:ea typeface="Calibri" pitchFamily="34" charset="-122"/>
+                <a:cs typeface="+mj-cs"/>
+              </a:rPr>
+              <a:t>5 </a:t>
+            </a:r>
             <a:r>
               <a:rPr lang="en-US" sz="1100" dirty="0">
                 <a:solidFill>
@@ -5386,11 +5012,13 @@
                 </a:solidFill>
                 <a:latin typeface="Calibri" pitchFamily="34" charset="0"/>
                 <a:ea typeface="Calibri" pitchFamily="34" charset="-122"/>
-                <a:cs typeface="Calibri" pitchFamily="34" charset="-120"/>
-              </a:rPr>
-              <a:t>~5 M paramètres</a:t>
-            </a:r>
-            <a:endParaRPr lang="en-US" sz="1100" dirty="0"/>
+                <a:cs typeface="+mj-cs"/>
+              </a:rPr>
+              <a:t>M paramètres</a:t>
+            </a:r>
+            <a:endParaRPr lang="en-US" sz="1100" dirty="0">
+              <a:cs typeface="+mj-cs"/>
+            </a:endParaRPr>
           </a:p>
         </p:txBody>
       </p:sp>
@@ -5440,21 +5068,23 @@
           <a:bodyPr wrap="square" rtlCol="0" anchor="ctr"/>
           <a:lstStyle/>
           <a:p>
-            <a:pPr indent="0" marL="0">
-              <a:buNone/>
-            </a:pPr>
-            <a:r>
-              <a:rPr lang="en-US" sz="1100" dirty="0">
+            <a:pPr marL="0" indent="0">
+              <a:buNone/>
+            </a:pPr>
+            <a:r>
+              <a:rPr lang="en-US" sz="1200" dirty="0">
                 <a:solidFill>
                   <a:srgbClr val="1E293B"/>
                 </a:solidFill>
                 <a:latin typeface="Calibri" pitchFamily="34" charset="0"/>
                 <a:ea typeface="Calibri" pitchFamily="34" charset="-122"/>
-                <a:cs typeface="Calibri" pitchFamily="34" charset="-120"/>
+                <a:cs typeface="+mj-cs"/>
               </a:rPr>
               <a:t>• Tous les poids libres</a:t>
             </a:r>
-            <a:endParaRPr lang="en-US" sz="1100" dirty="0"/>
+            <a:endParaRPr lang="en-US" sz="1200" dirty="0">
+              <a:cs typeface="+mj-cs"/>
+            </a:endParaRPr>
           </a:p>
         </p:txBody>
       </p:sp>
@@ -5479,21 +5109,23 @@
           <a:bodyPr wrap="square" rtlCol="0" anchor="ctr"/>
           <a:lstStyle/>
           <a:p>
-            <a:pPr indent="0" marL="0">
-              <a:buNone/>
-            </a:pPr>
-            <a:r>
-              <a:rPr lang="en-US" sz="1100" dirty="0">
+            <a:pPr marL="0" indent="0">
+              <a:buNone/>
+            </a:pPr>
+            <a:r>
+              <a:rPr lang="en-US" sz="1200" dirty="0">
                 <a:solidFill>
                   <a:srgbClr val="1E293B"/>
                 </a:solidFill>
                 <a:latin typeface="Calibri" pitchFamily="34" charset="0"/>
                 <a:ea typeface="Calibri" pitchFamily="34" charset="-122"/>
-                <a:cs typeface="Calibri" pitchFamily="34" charset="-120"/>
+                <a:cs typeface="+mj-cs"/>
               </a:rPr>
               <a:t>• Classifier remplacé</a:t>
             </a:r>
-            <a:endParaRPr lang="en-US" sz="1100" dirty="0"/>
+            <a:endParaRPr lang="en-US" sz="1200" dirty="0">
+              <a:cs typeface="+mj-cs"/>
+            </a:endParaRPr>
           </a:p>
         </p:txBody>
       </p:sp>
@@ -5518,21 +5150,23 @@
           <a:bodyPr wrap="square" rtlCol="0" anchor="ctr"/>
           <a:lstStyle/>
           <a:p>
-            <a:pPr indent="0" marL="0">
-              <a:buNone/>
-            </a:pPr>
-            <a:r>
-              <a:rPr lang="en-US" sz="1100" dirty="0">
+            <a:pPr marL="0" indent="0">
+              <a:buNone/>
+            </a:pPr>
+            <a:r>
+              <a:rPr lang="en-US" sz="1200" dirty="0">
                 <a:solidFill>
                   <a:srgbClr val="1E293B"/>
                 </a:solidFill>
                 <a:latin typeface="Calibri" pitchFamily="34" charset="0"/>
                 <a:ea typeface="Calibri" pitchFamily="34" charset="-122"/>
-                <a:cs typeface="Calibri" pitchFamily="34" charset="-120"/>
+                <a:cs typeface="+mj-cs"/>
               </a:rPr>
               <a:t>• AdamW + weight_decay</a:t>
             </a:r>
-            <a:endParaRPr lang="en-US" sz="1100" dirty="0"/>
+            <a:endParaRPr lang="en-US" sz="1200" dirty="0">
+              <a:cs typeface="+mj-cs"/>
+            </a:endParaRPr>
           </a:p>
         </p:txBody>
       </p:sp>
@@ -5557,21 +5191,23 @@
           <a:bodyPr wrap="square" rtlCol="0" anchor="ctr"/>
           <a:lstStyle/>
           <a:p>
-            <a:pPr indent="0" marL="0">
-              <a:buNone/>
-            </a:pPr>
-            <a:r>
-              <a:rPr lang="en-US" sz="1100" dirty="0">
+            <a:pPr marL="0" indent="0">
+              <a:buNone/>
+            </a:pPr>
+            <a:r>
+              <a:rPr lang="en-US" sz="1200" dirty="0">
                 <a:solidFill>
                   <a:srgbClr val="1E293B"/>
                 </a:solidFill>
                 <a:latin typeface="Calibri" pitchFamily="34" charset="0"/>
                 <a:ea typeface="Calibri" pitchFamily="34" charset="-122"/>
-                <a:cs typeface="Calibri" pitchFamily="34" charset="-120"/>
+                <a:cs typeface="+mj-cs"/>
               </a:rPr>
               <a:t>• CosineAnnealingLR</a:t>
             </a:r>
-            <a:endParaRPr lang="en-US" sz="1100" dirty="0"/>
+            <a:endParaRPr lang="en-US" sz="1200" dirty="0">
+              <a:cs typeface="+mj-cs"/>
+            </a:endParaRPr>
           </a:p>
         </p:txBody>
       </p:sp>
@@ -5591,6 +5227,7 @@
         <a:solidFill>
           <a:srgbClr val="FFFFFF"/>
         </a:solidFill>
+        <a:effectLst/>
       </p:bgPr>
     </p:bg>
     <p:spTree>
@@ -5609,31 +5246,6 @@
       </p:grpSpPr>
       <p:sp>
         <p:nvSpPr>
-          <p:cNvPr id="2" name="Shape 0"/>
-          <p:cNvSpPr/>
-          <p:nvPr/>
-        </p:nvSpPr>
-        <p:spPr>
-          <a:xfrm>
-            <a:off x="320040" y="201168"/>
-            <a:ext cx="64008" cy="502920"/>
-          </a:xfrm>
-          <a:prstGeom prst="rect">
-            <a:avLst/>
-          </a:prstGeom>
-          <a:solidFill>
-            <a:srgbClr val="1E40AF"/>
-          </a:solidFill>
-          <a:ln w="12700">
-            <a:solidFill>
-              <a:srgbClr val="1E40AF"/>
-            </a:solidFill>
-            <a:prstDash val="solid"/>
-          </a:ln>
-        </p:spPr>
-      </p:sp>
-      <p:sp>
-        <p:nvSpPr>
           <p:cNvPr id="3" name="Text 1"/>
           <p:cNvSpPr/>
           <p:nvPr/>
@@ -5653,7 +5265,7 @@
           <a:bodyPr wrap="square" lIns="0" tIns="0" rIns="0" bIns="0" rtlCol="0" anchor="ctr"/>
           <a:lstStyle/>
           <a:p>
-            <a:pPr indent="0" marL="0">
+            <a:pPr marL="0" indent="0">
               <a:buNone/>
             </a:pPr>
             <a:r>
@@ -5668,45 +5280,6 @@
               <a:t>Courbes d'apprentissage</a:t>
             </a:r>
             <a:endParaRPr lang="en-US" sz="2600" dirty="0"/>
-          </a:p>
-        </p:txBody>
-      </p:sp>
-      <p:sp>
-        <p:nvSpPr>
-          <p:cNvPr id="4" name="Text 2"/>
-          <p:cNvSpPr/>
-          <p:nvPr/>
-        </p:nvSpPr>
-        <p:spPr>
-          <a:xfrm>
-            <a:off x="475488" y="694944"/>
-            <a:ext cx="8229600" cy="256032"/>
-          </a:xfrm>
-          <a:prstGeom prst="rect">
-            <a:avLst/>
-          </a:prstGeom>
-          <a:noFill/>
-          <a:ln/>
-        </p:spPr>
-        <p:txBody>
-          <a:bodyPr wrap="square" lIns="0" tIns="0" rIns="0" bIns="0" rtlCol="0" anchor="ctr"/>
-          <a:lstStyle/>
-          <a:p>
-            <a:pPr indent="0" marL="0">
-              <a:buNone/>
-            </a:pPr>
-            <a:r>
-              <a:rPr lang="en-US" sz="1200" i="1" dirty="0">
-                <a:solidFill>
-                  <a:srgbClr val="64748B"/>
-                </a:solidFill>
-                <a:latin typeface="Calibri" pitchFamily="34" charset="0"/>
-                <a:ea typeface="Calibri" pitchFamily="34" charset="-122"/>
-                <a:cs typeface="Calibri" pitchFamily="34" charset="-120"/>
-              </a:rPr>
-              <a:t>Val Loss &amp; Val Accuracy sur 10 epochs</a:t>
-            </a:r>
-            <a:endParaRPr lang="en-US" sz="1200" dirty="0"/>
           </a:p>
         </p:txBody>
       </p:sp>
@@ -5737,15 +5310,15 @@
       </p:sp>
       <p:pic>
         <p:nvPicPr>
-          <p:cNvPr id="6" name="Image 0" descr="preencoded.png">    </p:cNvPr>
+          <p:cNvPr id="6" name="Image 0" descr="preencoded.png"/>
           <p:cNvPicPr>
             <a:picLocks noChangeAspect="1"/>
           </p:cNvPicPr>
           <p:nvPr/>
         </p:nvPicPr>
         <p:blipFill>
-          <a:blip r:embed="rId1"/>
-          <a:srcRect l="0" r="0" t="0" b="0"/>
+          <a:blip r:embed="rId3"/>
+          <a:srcRect/>
           <a:stretch/>
         </p:blipFill>
         <p:spPr>
@@ -5804,7 +5377,7 @@
           <a:bodyPr wrap="square" rtlCol="0" anchor="ctr"/>
           <a:lstStyle/>
           <a:p>
-            <a:pPr algn="ctr" indent="0" marL="0">
+            <a:pPr marL="0" indent="0" algn="ctr">
               <a:buNone/>
             </a:pPr>
             <a:r>
@@ -5868,7 +5441,7 @@
           <a:bodyPr wrap="square" rtlCol="0" anchor="ctr"/>
           <a:lstStyle/>
           <a:p>
-            <a:pPr algn="ctr" indent="0" marL="0">
+            <a:pPr marL="0" indent="0" algn="ctr">
               <a:buNone/>
             </a:pPr>
             <a:r>
@@ -5932,7 +5505,7 @@
           <a:bodyPr wrap="square" rtlCol="0" anchor="ctr"/>
           <a:lstStyle/>
           <a:p>
-            <a:pPr algn="ctr" indent="0" marL="0">
+            <a:pPr marL="0" indent="0" algn="ctr">
               <a:buNone/>
             </a:pPr>
             <a:r>
@@ -5966,6 +5539,7 @@
         <a:solidFill>
           <a:srgbClr val="FFFFFF"/>
         </a:solidFill>
+        <a:effectLst/>
       </p:bgPr>
     </p:bg>
     <p:spTree>
@@ -5984,14 +5558,101 @@
       </p:grpSpPr>
       <p:sp>
         <p:nvSpPr>
-          <p:cNvPr id="2" name="Shape 0"/>
-          <p:cNvSpPr/>
-          <p:nvPr/>
-        </p:nvSpPr>
-        <p:spPr>
-          <a:xfrm>
-            <a:off x="320040" y="201168"/>
-            <a:ext cx="64008" cy="502920"/>
+          <p:cNvPr id="3" name="Text 1"/>
+          <p:cNvSpPr/>
+          <p:nvPr/>
+        </p:nvSpPr>
+        <p:spPr>
+          <a:xfrm>
+            <a:off x="475488" y="164592"/>
+            <a:ext cx="8229600" cy="548640"/>
+          </a:xfrm>
+          <a:prstGeom prst="rect">
+            <a:avLst/>
+          </a:prstGeom>
+          <a:noFill/>
+          <a:ln/>
+        </p:spPr>
+        <p:txBody>
+          <a:bodyPr wrap="square" lIns="0" tIns="0" rIns="0" bIns="0" rtlCol="0" anchor="ctr"/>
+          <a:lstStyle/>
+          <a:p>
+            <a:pPr marL="0" indent="0">
+              <a:buNone/>
+            </a:pPr>
+            <a:r>
+              <a:rPr lang="en-US" sz="2600" b="1" dirty="0">
+                <a:solidFill>
+                  <a:srgbClr val="1E293B"/>
+                </a:solidFill>
+                <a:latin typeface="Calibri" pitchFamily="34" charset="0"/>
+                <a:ea typeface="Calibri" pitchFamily="34" charset="-122"/>
+                <a:cs typeface="Calibri" pitchFamily="34" charset="-120"/>
+              </a:rPr>
+              <a:t>Classement final</a:t>
+            </a:r>
+            <a:endParaRPr lang="en-US" sz="2600" dirty="0"/>
+          </a:p>
+        </p:txBody>
+      </p:sp>
+      <p:sp>
+        <p:nvSpPr>
+          <p:cNvPr id="5" name="Shape 3"/>
+          <p:cNvSpPr/>
+          <p:nvPr/>
+        </p:nvSpPr>
+        <p:spPr>
+          <a:xfrm>
+            <a:off x="320040" y="960120"/>
+            <a:ext cx="8503920" cy="16459"/>
+          </a:xfrm>
+          <a:prstGeom prst="rect">
+            <a:avLst/>
+          </a:prstGeom>
+          <a:solidFill>
+            <a:srgbClr val="DBEAFE"/>
+          </a:solidFill>
+          <a:ln w="12700">
+            <a:solidFill>
+              <a:srgbClr val="DBEAFE"/>
+            </a:solidFill>
+            <a:prstDash val="solid"/>
+          </a:ln>
+        </p:spPr>
+      </p:sp>
+      <p:pic>
+        <p:nvPicPr>
+          <p:cNvPr id="6" name="Image 0" descr="preencoded.png"/>
+          <p:cNvPicPr>
+            <a:picLocks noChangeAspect="1"/>
+          </p:cNvPicPr>
+          <p:nvPr/>
+        </p:nvPicPr>
+        <p:blipFill>
+          <a:blip r:embed="rId3"/>
+          <a:srcRect/>
+          <a:stretch/>
+        </p:blipFill>
+        <p:spPr>
+          <a:xfrm>
+            <a:off x="548640" y="1051560"/>
+            <a:ext cx="8046720" cy="3154680"/>
+          </a:xfrm>
+          <a:prstGeom prst="rect">
+            <a:avLst/>
+          </a:prstGeom>
+        </p:spPr>
+      </p:pic>
+      <p:sp>
+        <p:nvSpPr>
+          <p:cNvPr id="7" name="Shape 4"/>
+          <p:cNvSpPr/>
+          <p:nvPr/>
+        </p:nvSpPr>
+        <p:spPr>
+          <a:xfrm>
+            <a:off x="1828800" y="4370832"/>
+            <a:ext cx="5486400" cy="502920"/>
           </a:xfrm>
           <a:prstGeom prst="rect">
             <a:avLst/>
@@ -6009,133 +5670,7 @@
       </p:sp>
       <p:sp>
         <p:nvSpPr>
-          <p:cNvPr id="3" name="Text 1"/>
-          <p:cNvSpPr/>
-          <p:nvPr/>
-        </p:nvSpPr>
-        <p:spPr>
-          <a:xfrm>
-            <a:off x="475488" y="164592"/>
-            <a:ext cx="8229600" cy="548640"/>
-          </a:xfrm>
-          <a:prstGeom prst="rect">
-            <a:avLst/>
-          </a:prstGeom>
-          <a:noFill/>
-          <a:ln/>
-        </p:spPr>
-        <p:txBody>
-          <a:bodyPr wrap="square" lIns="0" tIns="0" rIns="0" bIns="0" rtlCol="0" anchor="ctr"/>
-          <a:lstStyle/>
-          <a:p>
-            <a:pPr indent="0" marL="0">
-              <a:buNone/>
-            </a:pPr>
-            <a:r>
-              <a:rPr lang="en-US" sz="2600" b="1" dirty="0">
-                <a:solidFill>
-                  <a:srgbClr val="1E293B"/>
-                </a:solidFill>
-                <a:latin typeface="Calibri" pitchFamily="34" charset="0"/>
-                <a:ea typeface="Calibri" pitchFamily="34" charset="-122"/>
-                <a:cs typeface="Calibri" pitchFamily="34" charset="-120"/>
-              </a:rPr>
-              <a:t>Classement final</a:t>
-            </a:r>
-            <a:endParaRPr lang="en-US" sz="2600" dirty="0"/>
-          </a:p>
-        </p:txBody>
-      </p:sp>
-      <p:sp>
-        <p:nvSpPr>
-          <p:cNvPr id="4" name="Text 2"/>
-          <p:cNvSpPr/>
-          <p:nvPr/>
-        </p:nvSpPr>
-        <p:spPr>
-          <a:xfrm>
-            <a:off x="475488" y="694944"/>
-            <a:ext cx="8229600" cy="256032"/>
-          </a:xfrm>
-          <a:prstGeom prst="rect">
-            <a:avLst/>
-          </a:prstGeom>
-          <a:noFill/>
-          <a:ln/>
-        </p:spPr>
-        <p:txBody>
-          <a:bodyPr wrap="square" lIns="0" tIns="0" rIns="0" bIns="0" rtlCol="0" anchor="ctr"/>
-          <a:lstStyle/>
-          <a:p>
-            <a:pPr indent="0" marL="0">
-              <a:buNone/>
-            </a:pPr>
-            <a:r>
-              <a:rPr lang="en-US" sz="1200" i="1" dirty="0">
-                <a:solidFill>
-                  <a:srgbClr val="64748B"/>
-                </a:solidFill>
-                <a:latin typeface="Calibri" pitchFamily="34" charset="0"/>
-                <a:ea typeface="Calibri" pitchFamily="34" charset="-122"/>
-                <a:cs typeface="Calibri" pitchFamily="34" charset="-120"/>
-              </a:rPr>
-              <a:t>Comparaison Val Accuracy — 3 architectures</a:t>
-            </a:r>
-            <a:endParaRPr lang="en-US" sz="1200" dirty="0"/>
-          </a:p>
-        </p:txBody>
-      </p:sp>
-      <p:sp>
-        <p:nvSpPr>
-          <p:cNvPr id="5" name="Shape 3"/>
-          <p:cNvSpPr/>
-          <p:nvPr/>
-        </p:nvSpPr>
-        <p:spPr>
-          <a:xfrm>
-            <a:off x="320040" y="960120"/>
-            <a:ext cx="8503920" cy="16459"/>
-          </a:xfrm>
-          <a:prstGeom prst="rect">
-            <a:avLst/>
-          </a:prstGeom>
-          <a:solidFill>
-            <a:srgbClr val="DBEAFE"/>
-          </a:solidFill>
-          <a:ln w="12700">
-            <a:solidFill>
-              <a:srgbClr val="DBEAFE"/>
-            </a:solidFill>
-            <a:prstDash val="solid"/>
-          </a:ln>
-        </p:spPr>
-      </p:sp>
-      <p:pic>
-        <p:nvPicPr>
-          <p:cNvPr id="6" name="Image 0" descr="preencoded.png">    </p:cNvPr>
-          <p:cNvPicPr>
-            <a:picLocks noChangeAspect="1"/>
-          </p:cNvPicPr>
-          <p:nvPr/>
-        </p:nvPicPr>
-        <p:blipFill>
-          <a:blip r:embed="rId1"/>
-          <a:srcRect l="0" r="0" t="0" b="0"/>
-          <a:stretch/>
-        </p:blipFill>
-        <p:spPr>
-          <a:xfrm>
-            <a:off x="548640" y="1051560"/>
-            <a:ext cx="8046720" cy="3154680"/>
-          </a:xfrm>
-          <a:prstGeom prst="rect">
-            <a:avLst/>
-          </a:prstGeom>
-        </p:spPr>
-      </p:pic>
-      <p:sp>
-        <p:nvSpPr>
-          <p:cNvPr id="7" name="Shape 4"/>
+          <p:cNvPr id="8" name="Text 5"/>
           <p:cNvSpPr/>
           <p:nvPr/>
         </p:nvSpPr>
@@ -6147,39 +5682,14 @@
           <a:prstGeom prst="rect">
             <a:avLst/>
           </a:prstGeom>
-          <a:solidFill>
-            <a:srgbClr val="1E40AF"/>
-          </a:solidFill>
-          <a:ln w="12700">
-            <a:solidFill>
-              <a:srgbClr val="1E40AF"/>
-            </a:solidFill>
-            <a:prstDash val="solid"/>
-          </a:ln>
-        </p:spPr>
-      </p:sp>
-      <p:sp>
-        <p:nvSpPr>
-          <p:cNvPr id="8" name="Text 5"/>
-          <p:cNvSpPr/>
-          <p:nvPr/>
-        </p:nvSpPr>
-        <p:spPr>
-          <a:xfrm>
-            <a:off x="1828800" y="4370832"/>
-            <a:ext cx="5486400" cy="502920"/>
-          </a:xfrm>
-          <a:prstGeom prst="rect">
-            <a:avLst/>
-          </a:prstGeom>
-          <a:noFill/>
-          <a:ln/>
-        </p:spPr>
-        <p:txBody>
-          <a:bodyPr wrap="square" rtlCol="0" anchor="ctr"/>
-          <a:lstStyle/>
-          <a:p>
-            <a:pPr algn="ctr" indent="0" marL="0">
+          <a:noFill/>
+          <a:ln/>
+        </p:spPr>
+        <p:txBody>
+          <a:bodyPr wrap="square" rtlCol="0" anchor="ctr"/>
+          <a:lstStyle/>
+          <a:p>
+            <a:pPr marL="0" indent="0" algn="ctr">
               <a:buNone/>
             </a:pPr>
             <a:r>
@@ -6213,6 +5723,7 @@
         <a:solidFill>
           <a:srgbClr val="FFFFFF"/>
         </a:solidFill>
+        <a:effectLst/>
       </p:bgPr>
     </p:bg>
     <p:spTree>
@@ -6231,14 +5742,101 @@
       </p:grpSpPr>
       <p:sp>
         <p:nvSpPr>
-          <p:cNvPr id="2" name="Shape 0"/>
-          <p:cNvSpPr/>
-          <p:nvPr/>
-        </p:nvSpPr>
-        <p:spPr>
-          <a:xfrm>
-            <a:off x="320040" y="201168"/>
-            <a:ext cx="64008" cy="502920"/>
+          <p:cNvPr id="3" name="Text 1"/>
+          <p:cNvSpPr/>
+          <p:nvPr/>
+        </p:nvSpPr>
+        <p:spPr>
+          <a:xfrm>
+            <a:off x="475488" y="164592"/>
+            <a:ext cx="8229600" cy="548640"/>
+          </a:xfrm>
+          <a:prstGeom prst="rect">
+            <a:avLst/>
+          </a:prstGeom>
+          <a:noFill/>
+          <a:ln/>
+        </p:spPr>
+        <p:txBody>
+          <a:bodyPr wrap="square" lIns="0" tIns="0" rIns="0" bIns="0" rtlCol="0" anchor="ctr"/>
+          <a:lstStyle/>
+          <a:p>
+            <a:pPr marL="0" indent="0">
+              <a:buNone/>
+            </a:pPr>
+            <a:r>
+              <a:rPr lang="en-US" sz="2600" b="1" dirty="0">
+                <a:solidFill>
+                  <a:srgbClr val="1E293B"/>
+                </a:solidFill>
+                <a:latin typeface="Calibri" pitchFamily="34" charset="0"/>
+                <a:ea typeface="Calibri" pitchFamily="34" charset="-122"/>
+                <a:cs typeface="Calibri" pitchFamily="34" charset="-120"/>
+              </a:rPr>
+              <a:t>Matrice de confusion — EfficientNet-B0</a:t>
+            </a:r>
+            <a:endParaRPr lang="en-US" sz="2600" dirty="0"/>
+          </a:p>
+        </p:txBody>
+      </p:sp>
+      <p:sp>
+        <p:nvSpPr>
+          <p:cNvPr id="5" name="Shape 3"/>
+          <p:cNvSpPr/>
+          <p:nvPr/>
+        </p:nvSpPr>
+        <p:spPr>
+          <a:xfrm>
+            <a:off x="320040" y="960120"/>
+            <a:ext cx="8503920" cy="16459"/>
+          </a:xfrm>
+          <a:prstGeom prst="rect">
+            <a:avLst/>
+          </a:prstGeom>
+          <a:solidFill>
+            <a:srgbClr val="DBEAFE"/>
+          </a:solidFill>
+          <a:ln w="12700">
+            <a:solidFill>
+              <a:srgbClr val="DBEAFE"/>
+            </a:solidFill>
+            <a:prstDash val="solid"/>
+          </a:ln>
+        </p:spPr>
+      </p:sp>
+      <p:pic>
+        <p:nvPicPr>
+          <p:cNvPr id="6" name="Image 0" descr="preencoded.png"/>
+          <p:cNvPicPr>
+            <a:picLocks noChangeAspect="1"/>
+          </p:cNvPicPr>
+          <p:nvPr/>
+        </p:nvPicPr>
+        <p:blipFill>
+          <a:blip r:embed="rId3"/>
+          <a:srcRect/>
+          <a:stretch/>
+        </p:blipFill>
+        <p:spPr>
+          <a:xfrm>
+            <a:off x="365760" y="1051560"/>
+            <a:ext cx="8412480" cy="3273552"/>
+          </a:xfrm>
+          <a:prstGeom prst="rect">
+            <a:avLst/>
+          </a:prstGeom>
+        </p:spPr>
+      </p:pic>
+      <p:sp>
+        <p:nvSpPr>
+          <p:cNvPr id="7" name="Shape 4"/>
+          <p:cNvSpPr/>
+          <p:nvPr/>
+        </p:nvSpPr>
+        <p:spPr>
+          <a:xfrm>
+            <a:off x="1097280" y="4462272"/>
+            <a:ext cx="3474720" cy="411480"/>
           </a:xfrm>
           <a:prstGeom prst="rect">
             <a:avLst/>
@@ -6256,133 +5854,7 @@
       </p:sp>
       <p:sp>
         <p:nvSpPr>
-          <p:cNvPr id="3" name="Text 1"/>
-          <p:cNvSpPr/>
-          <p:nvPr/>
-        </p:nvSpPr>
-        <p:spPr>
-          <a:xfrm>
-            <a:off x="475488" y="164592"/>
-            <a:ext cx="8229600" cy="548640"/>
-          </a:xfrm>
-          <a:prstGeom prst="rect">
-            <a:avLst/>
-          </a:prstGeom>
-          <a:noFill/>
-          <a:ln/>
-        </p:spPr>
-        <p:txBody>
-          <a:bodyPr wrap="square" lIns="0" tIns="0" rIns="0" bIns="0" rtlCol="0" anchor="ctr"/>
-          <a:lstStyle/>
-          <a:p>
-            <a:pPr indent="0" marL="0">
-              <a:buNone/>
-            </a:pPr>
-            <a:r>
-              <a:rPr lang="en-US" sz="2600" b="1" dirty="0">
-                <a:solidFill>
-                  <a:srgbClr val="1E293B"/>
-                </a:solidFill>
-                <a:latin typeface="Calibri" pitchFamily="34" charset="0"/>
-                <a:ea typeface="Calibri" pitchFamily="34" charset="-122"/>
-                <a:cs typeface="Calibri" pitchFamily="34" charset="-120"/>
-              </a:rPr>
-              <a:t>Matrice de confusion — EfficientNet-B0</a:t>
-            </a:r>
-            <a:endParaRPr lang="en-US" sz="2600" dirty="0"/>
-          </a:p>
-        </p:txBody>
-      </p:sp>
-      <p:sp>
-        <p:nvSpPr>
-          <p:cNvPr id="4" name="Text 2"/>
-          <p:cNvSpPr/>
-          <p:nvPr/>
-        </p:nvSpPr>
-        <p:spPr>
-          <a:xfrm>
-            <a:off x="475488" y="694944"/>
-            <a:ext cx="8229600" cy="256032"/>
-          </a:xfrm>
-          <a:prstGeom prst="rect">
-            <a:avLst/>
-          </a:prstGeom>
-          <a:noFill/>
-          <a:ln/>
-        </p:spPr>
-        <p:txBody>
-          <a:bodyPr wrap="square" lIns="0" tIns="0" rIns="0" bIns="0" rtlCol="0" anchor="ctr"/>
-          <a:lstStyle/>
-          <a:p>
-            <a:pPr indent="0" marL="0">
-              <a:buNone/>
-            </a:pPr>
-            <a:r>
-              <a:rPr lang="en-US" sz="1200" i="1" dirty="0">
-                <a:solidFill>
-                  <a:srgbClr val="64748B"/>
-                </a:solidFill>
-                <a:latin typeface="Calibri" pitchFamily="34" charset="0"/>
-                <a:ea typeface="Calibri" pitchFamily="34" charset="-122"/>
-                <a:cs typeface="Calibri" pitchFamily="34" charset="-120"/>
-              </a:rPr>
-              <a:t>Effectifs et taux par classe</a:t>
-            </a:r>
-            <a:endParaRPr lang="en-US" sz="1200" dirty="0"/>
-          </a:p>
-        </p:txBody>
-      </p:sp>
-      <p:sp>
-        <p:nvSpPr>
-          <p:cNvPr id="5" name="Shape 3"/>
-          <p:cNvSpPr/>
-          <p:nvPr/>
-        </p:nvSpPr>
-        <p:spPr>
-          <a:xfrm>
-            <a:off x="320040" y="960120"/>
-            <a:ext cx="8503920" cy="16459"/>
-          </a:xfrm>
-          <a:prstGeom prst="rect">
-            <a:avLst/>
-          </a:prstGeom>
-          <a:solidFill>
-            <a:srgbClr val="DBEAFE"/>
-          </a:solidFill>
-          <a:ln w="12700">
-            <a:solidFill>
-              <a:srgbClr val="DBEAFE"/>
-            </a:solidFill>
-            <a:prstDash val="solid"/>
-          </a:ln>
-        </p:spPr>
-      </p:sp>
-      <p:pic>
-        <p:nvPicPr>
-          <p:cNvPr id="6" name="Image 0" descr="preencoded.png">    </p:cNvPr>
-          <p:cNvPicPr>
-            <a:picLocks noChangeAspect="1"/>
-          </p:cNvPicPr>
-          <p:nvPr/>
-        </p:nvPicPr>
-        <p:blipFill>
-          <a:blip r:embed="rId1"/>
-          <a:srcRect l="0" r="0" t="0" b="0"/>
-          <a:stretch/>
-        </p:blipFill>
-        <p:spPr>
-          <a:xfrm>
-            <a:off x="365760" y="1051560"/>
-            <a:ext cx="8412480" cy="3273552"/>
-          </a:xfrm>
-          <a:prstGeom prst="rect">
-            <a:avLst/>
-          </a:prstGeom>
-        </p:spPr>
-      </p:pic>
-      <p:sp>
-        <p:nvSpPr>
-          <p:cNvPr id="7" name="Shape 4"/>
+          <p:cNvPr id="8" name="Text 5"/>
           <p:cNvSpPr/>
           <p:nvPr/>
         </p:nvSpPr>
@@ -6394,39 +5866,14 @@
           <a:prstGeom prst="rect">
             <a:avLst/>
           </a:prstGeom>
-          <a:solidFill>
-            <a:srgbClr val="1E40AF"/>
-          </a:solidFill>
-          <a:ln w="12700">
-            <a:solidFill>
-              <a:srgbClr val="1E40AF"/>
-            </a:solidFill>
-            <a:prstDash val="solid"/>
-          </a:ln>
-        </p:spPr>
-      </p:sp>
-      <p:sp>
-        <p:nvSpPr>
-          <p:cNvPr id="8" name="Text 5"/>
-          <p:cNvSpPr/>
-          <p:nvPr/>
-        </p:nvSpPr>
-        <p:spPr>
-          <a:xfrm>
-            <a:off x="1097280" y="4462272"/>
-            <a:ext cx="3474720" cy="411480"/>
-          </a:xfrm>
-          <a:prstGeom prst="rect">
-            <a:avLst/>
-          </a:prstGeom>
-          <a:noFill/>
-          <a:ln/>
-        </p:spPr>
-        <p:txBody>
-          <a:bodyPr wrap="square" rtlCol="0" anchor="ctr"/>
-          <a:lstStyle/>
-          <a:p>
-            <a:pPr algn="ctr" indent="0" marL="0">
+          <a:noFill/>
+          <a:ln/>
+        </p:spPr>
+        <p:txBody>
+          <a:bodyPr wrap="square" rtlCol="0" anchor="ctr"/>
+          <a:lstStyle/>
+          <a:p>
+            <a:pPr marL="0" indent="0" algn="ctr">
               <a:buNone/>
             </a:pPr>
             <a:r>
@@ -6490,7 +5937,7 @@
           <a:bodyPr wrap="square" rtlCol="0" anchor="ctr"/>
           <a:lstStyle/>
           <a:p>
-            <a:pPr algn="ctr" indent="0" marL="0">
+            <a:pPr marL="0" indent="0" algn="ctr">
               <a:buNone/>
             </a:pPr>
             <a:r>
@@ -6524,6 +5971,7 @@
         <a:solidFill>
           <a:srgbClr val="FFFFFF"/>
         </a:solidFill>
+        <a:effectLst/>
       </p:bgPr>
     </p:bg>
     <p:spTree>
@@ -6542,31 +5990,6 @@
       </p:grpSpPr>
       <p:sp>
         <p:nvSpPr>
-          <p:cNvPr id="2" name="Shape 0"/>
-          <p:cNvSpPr/>
-          <p:nvPr/>
-        </p:nvSpPr>
-        <p:spPr>
-          <a:xfrm>
-            <a:off x="320040" y="201168"/>
-            <a:ext cx="64008" cy="502920"/>
-          </a:xfrm>
-          <a:prstGeom prst="rect">
-            <a:avLst/>
-          </a:prstGeom>
-          <a:solidFill>
-            <a:srgbClr val="1E40AF"/>
-          </a:solidFill>
-          <a:ln w="12700">
-            <a:solidFill>
-              <a:srgbClr val="1E40AF"/>
-            </a:solidFill>
-            <a:prstDash val="solid"/>
-          </a:ln>
-        </p:spPr>
-      </p:sp>
-      <p:sp>
-        <p:nvSpPr>
           <p:cNvPr id="3" name="Text 1"/>
           <p:cNvSpPr/>
           <p:nvPr/>
@@ -6586,7 +6009,7 @@
           <a:bodyPr wrap="square" lIns="0" tIns="0" rIns="0" bIns="0" rtlCol="0" anchor="ctr"/>
           <a:lstStyle/>
           <a:p>
-            <a:pPr indent="0" marL="0">
+            <a:pPr marL="0" indent="0">
               <a:buNone/>
             </a:pPr>
             <a:r>
@@ -6601,45 +6024,6 @@
               <a:t>Grad-CAM — Cartes d'attention</a:t>
             </a:r>
             <a:endParaRPr lang="en-US" sz="2600" dirty="0"/>
-          </a:p>
-        </p:txBody>
-      </p:sp>
-      <p:sp>
-        <p:nvSpPr>
-          <p:cNvPr id="4" name="Text 2"/>
-          <p:cNvSpPr/>
-          <p:nvPr/>
-        </p:nvSpPr>
-        <p:spPr>
-          <a:xfrm>
-            <a:off x="475488" y="694944"/>
-            <a:ext cx="8229600" cy="256032"/>
-          </a:xfrm>
-          <a:prstGeom prst="rect">
-            <a:avLst/>
-          </a:prstGeom>
-          <a:noFill/>
-          <a:ln/>
-        </p:spPr>
-        <p:txBody>
-          <a:bodyPr wrap="square" lIns="0" tIns="0" rIns="0" bIns="0" rtlCol="0" anchor="ctr"/>
-          <a:lstStyle/>
-          <a:p>
-            <a:pPr indent="0" marL="0">
-              <a:buNone/>
-            </a:pPr>
-            <a:r>
-              <a:rPr lang="en-US" sz="1200" i="1" dirty="0">
-                <a:solidFill>
-                  <a:srgbClr val="64748B"/>
-                </a:solidFill>
-                <a:latin typeface="Calibri" pitchFamily="34" charset="0"/>
-                <a:ea typeface="Calibri" pitchFamily="34" charset="-122"/>
-                <a:cs typeface="Calibri" pitchFamily="34" charset="-120"/>
-              </a:rPr>
-              <a:t>Le modèle se concentre sur les flammes et la fumée</a:t>
-            </a:r>
-            <a:endParaRPr lang="en-US" sz="1200" dirty="0"/>
           </a:p>
         </p:txBody>
       </p:sp>
@@ -6670,15 +6054,15 @@
       </p:sp>
       <p:pic>
         <p:nvPicPr>
-          <p:cNvPr id="6" name="Image 0" descr="preencoded.png">    </p:cNvPr>
+          <p:cNvPr id="6" name="Image 0" descr="preencoded.png"/>
           <p:cNvPicPr>
             <a:picLocks noChangeAspect="1"/>
           </p:cNvPicPr>
           <p:nvPr/>
         </p:nvPicPr>
         <p:blipFill>
-          <a:blip r:embed="rId1"/>
-          <a:srcRect l="0" r="0" t="0" b="0"/>
+          <a:blip r:embed="rId3"/>
+          <a:srcRect/>
           <a:stretch/>
         </p:blipFill>
         <p:spPr>
@@ -6712,7 +6096,7 @@
           <a:bodyPr wrap="square" rtlCol="0" anchor="ctr"/>
           <a:lstStyle/>
           <a:p>
-            <a:pPr algn="ctr" indent="0" marL="0">
+            <a:pPr marL="0" indent="0" algn="ctr">
               <a:buNone/>
             </a:pPr>
             <a:r>
@@ -6746,6 +6130,7 @@
         <a:solidFill>
           <a:srgbClr val="FFFFFF"/>
         </a:solidFill>
+        <a:effectLst/>
       </p:bgPr>
     </p:bg>
     <p:spTree>
@@ -6764,31 +6149,6 @@
       </p:grpSpPr>
       <p:sp>
         <p:nvSpPr>
-          <p:cNvPr id="2" name="Shape 0"/>
-          <p:cNvSpPr/>
-          <p:nvPr/>
-        </p:nvSpPr>
-        <p:spPr>
-          <a:xfrm>
-            <a:off x="320040" y="201168"/>
-            <a:ext cx="64008" cy="502920"/>
-          </a:xfrm>
-          <a:prstGeom prst="rect">
-            <a:avLst/>
-          </a:prstGeom>
-          <a:solidFill>
-            <a:srgbClr val="1E40AF"/>
-          </a:solidFill>
-          <a:ln w="12700">
-            <a:solidFill>
-              <a:srgbClr val="1E40AF"/>
-            </a:solidFill>
-            <a:prstDash val="solid"/>
-          </a:ln>
-        </p:spPr>
-      </p:sp>
-      <p:sp>
-        <p:nvSpPr>
           <p:cNvPr id="3" name="Text 1"/>
           <p:cNvSpPr/>
           <p:nvPr/>
@@ -6808,7 +6168,7 @@
           <a:bodyPr wrap="square" lIns="0" tIns="0" rIns="0" bIns="0" rtlCol="0" anchor="ctr"/>
           <a:lstStyle/>
           <a:p>
-            <a:pPr indent="0" marL="0">
+            <a:pPr marL="0" indent="0">
               <a:buNone/>
             </a:pPr>
             <a:r>
@@ -6853,56 +6213,6 @@
       </p:sp>
       <p:sp>
         <p:nvSpPr>
-          <p:cNvPr id="5" name="Shape 3"/>
-          <p:cNvSpPr/>
-          <p:nvPr/>
-        </p:nvSpPr>
-        <p:spPr>
-          <a:xfrm>
-            <a:off x="320040" y="1115568"/>
-            <a:ext cx="8503920" cy="694944"/>
-          </a:xfrm>
-          <a:prstGeom prst="rect">
-            <a:avLst/>
-          </a:prstGeom>
-          <a:solidFill>
-            <a:srgbClr val="EFF6FF"/>
-          </a:solidFill>
-          <a:ln w="12700">
-            <a:solidFill>
-              <a:srgbClr val="DBEAFE"/>
-            </a:solidFill>
-            <a:prstDash val="solid"/>
-          </a:ln>
-        </p:spPr>
-      </p:sp>
-      <p:sp>
-        <p:nvSpPr>
-          <p:cNvPr id="6" name="Shape 4"/>
-          <p:cNvSpPr/>
-          <p:nvPr/>
-        </p:nvSpPr>
-        <p:spPr>
-          <a:xfrm>
-            <a:off x="320040" y="1115568"/>
-            <a:ext cx="54864" cy="694944"/>
-          </a:xfrm>
-          <a:prstGeom prst="rect">
-            <a:avLst/>
-          </a:prstGeom>
-          <a:solidFill>
-            <a:srgbClr val="1E40AF"/>
-          </a:solidFill>
-          <a:ln w="12700">
-            <a:solidFill>
-              <a:srgbClr val="1E40AF"/>
-            </a:solidFill>
-            <a:prstDash val="solid"/>
-          </a:ln>
-        </p:spPr>
-      </p:sp>
-      <p:sp>
-        <p:nvSpPr>
           <p:cNvPr id="7" name="Text 5"/>
           <p:cNvSpPr/>
           <p:nvPr/>
@@ -6922,7 +6232,7 @@
           <a:bodyPr wrap="square" rtlCol="0" anchor="ctr"/>
           <a:lstStyle/>
           <a:p>
-            <a:pPr algn="ctr" indent="0" marL="0">
+            <a:pPr marL="0" indent="0" algn="ctr">
               <a:buNone/>
             </a:pPr>
             <a:r>
@@ -6958,7 +6268,7 @@
           <a:bodyPr wrap="square" rtlCol="0" anchor="ctr"/>
           <a:lstStyle/>
           <a:p>
-            <a:pPr indent="0" marL="0">
+            <a:pPr marL="0" indent="0">
               <a:buNone/>
             </a:pPr>
             <a:r>
@@ -6975,56 +6285,6 @@
             <a:endParaRPr lang="en-US" sz="1500" dirty="0"/>
           </a:p>
         </p:txBody>
-      </p:sp>
-      <p:sp>
-        <p:nvSpPr>
-          <p:cNvPr id="9" name="Shape 7"/>
-          <p:cNvSpPr/>
-          <p:nvPr/>
-        </p:nvSpPr>
-        <p:spPr>
-          <a:xfrm>
-            <a:off x="320040" y="1984248"/>
-            <a:ext cx="8503920" cy="694944"/>
-          </a:xfrm>
-          <a:prstGeom prst="rect">
-            <a:avLst/>
-          </a:prstGeom>
-          <a:solidFill>
-            <a:srgbClr val="EFF6FF"/>
-          </a:solidFill>
-          <a:ln w="12700">
-            <a:solidFill>
-              <a:srgbClr val="DBEAFE"/>
-            </a:solidFill>
-            <a:prstDash val="solid"/>
-          </a:ln>
-        </p:spPr>
-      </p:sp>
-      <p:sp>
-        <p:nvSpPr>
-          <p:cNvPr id="10" name="Shape 8"/>
-          <p:cNvSpPr/>
-          <p:nvPr/>
-        </p:nvSpPr>
-        <p:spPr>
-          <a:xfrm>
-            <a:off x="320040" y="1984248"/>
-            <a:ext cx="54864" cy="694944"/>
-          </a:xfrm>
-          <a:prstGeom prst="rect">
-            <a:avLst/>
-          </a:prstGeom>
-          <a:solidFill>
-            <a:srgbClr val="0369A1"/>
-          </a:solidFill>
-          <a:ln w="12700">
-            <a:solidFill>
-              <a:srgbClr val="0369A1"/>
-            </a:solidFill>
-            <a:prstDash val="solid"/>
-          </a:ln>
-        </p:spPr>
       </p:sp>
       <p:sp>
         <p:nvSpPr>
@@ -7047,7 +6307,7 @@
           <a:bodyPr wrap="square" rtlCol="0" anchor="ctr"/>
           <a:lstStyle/>
           <a:p>
-            <a:pPr algn="ctr" indent="0" marL="0">
+            <a:pPr marL="0" indent="0" algn="ctr">
               <a:buNone/>
             </a:pPr>
             <a:r>
@@ -7083,7 +6343,7 @@
           <a:bodyPr wrap="square" rtlCol="0" anchor="ctr"/>
           <a:lstStyle/>
           <a:p>
-            <a:pPr indent="0" marL="0">
+            <a:pPr marL="0" indent="0">
               <a:buNone/>
             </a:pPr>
             <a:r>
@@ -7100,56 +6360,6 @@
             <a:endParaRPr lang="en-US" sz="1500" dirty="0"/>
           </a:p>
         </p:txBody>
-      </p:sp>
-      <p:sp>
-        <p:nvSpPr>
-          <p:cNvPr id="13" name="Shape 11"/>
-          <p:cNvSpPr/>
-          <p:nvPr/>
-        </p:nvSpPr>
-        <p:spPr>
-          <a:xfrm>
-            <a:off x="320040" y="2852928"/>
-            <a:ext cx="8503920" cy="694944"/>
-          </a:xfrm>
-          <a:prstGeom prst="rect">
-            <a:avLst/>
-          </a:prstGeom>
-          <a:solidFill>
-            <a:srgbClr val="EFF6FF"/>
-          </a:solidFill>
-          <a:ln w="12700">
-            <a:solidFill>
-              <a:srgbClr val="DBEAFE"/>
-            </a:solidFill>
-            <a:prstDash val="solid"/>
-          </a:ln>
-        </p:spPr>
-      </p:sp>
-      <p:sp>
-        <p:nvSpPr>
-          <p:cNvPr id="14" name="Shape 12"/>
-          <p:cNvSpPr/>
-          <p:nvPr/>
-        </p:nvSpPr>
-        <p:spPr>
-          <a:xfrm>
-            <a:off x="320040" y="2852928"/>
-            <a:ext cx="54864" cy="694944"/>
-          </a:xfrm>
-          <a:prstGeom prst="rect">
-            <a:avLst/>
-          </a:prstGeom>
-          <a:solidFill>
-            <a:srgbClr val="1D4ED8"/>
-          </a:solidFill>
-          <a:ln w="12700">
-            <a:solidFill>
-              <a:srgbClr val="1D4ED8"/>
-            </a:solidFill>
-            <a:prstDash val="solid"/>
-          </a:ln>
-        </p:spPr>
       </p:sp>
       <p:sp>
         <p:nvSpPr>
@@ -7172,7 +6382,7 @@
           <a:bodyPr wrap="square" rtlCol="0" anchor="ctr"/>
           <a:lstStyle/>
           <a:p>
-            <a:pPr algn="ctr" indent="0" marL="0">
+            <a:pPr marL="0" indent="0" algn="ctr">
               <a:buNone/>
             </a:pPr>
             <a:r>
@@ -7208,7 +6418,7 @@
           <a:bodyPr wrap="square" rtlCol="0" anchor="ctr"/>
           <a:lstStyle/>
           <a:p>
-            <a:pPr indent="0" marL="0">
+            <a:pPr marL="0" indent="0">
               <a:buNone/>
             </a:pPr>
             <a:r>
@@ -7225,56 +6435,6 @@
             <a:endParaRPr lang="en-US" sz="1500" dirty="0"/>
           </a:p>
         </p:txBody>
-      </p:sp>
-      <p:sp>
-        <p:nvSpPr>
-          <p:cNvPr id="17" name="Shape 15"/>
-          <p:cNvSpPr/>
-          <p:nvPr/>
-        </p:nvSpPr>
-        <p:spPr>
-          <a:xfrm>
-            <a:off x="320040" y="3721608"/>
-            <a:ext cx="8503920" cy="694944"/>
-          </a:xfrm>
-          <a:prstGeom prst="rect">
-            <a:avLst/>
-          </a:prstGeom>
-          <a:solidFill>
-            <a:srgbClr val="EFF6FF"/>
-          </a:solidFill>
-          <a:ln w="12700">
-            <a:solidFill>
-              <a:srgbClr val="DBEAFE"/>
-            </a:solidFill>
-            <a:prstDash val="solid"/>
-          </a:ln>
-        </p:spPr>
-      </p:sp>
-      <p:sp>
-        <p:nvSpPr>
-          <p:cNvPr id="18" name="Shape 16"/>
-          <p:cNvSpPr/>
-          <p:nvPr/>
-        </p:nvSpPr>
-        <p:spPr>
-          <a:xfrm>
-            <a:off x="320040" y="3721608"/>
-            <a:ext cx="54864" cy="694944"/>
-          </a:xfrm>
-          <a:prstGeom prst="rect">
-            <a:avLst/>
-          </a:prstGeom>
-          <a:solidFill>
-            <a:srgbClr val="0284C7"/>
-          </a:solidFill>
-          <a:ln w="12700">
-            <a:solidFill>
-              <a:srgbClr val="0284C7"/>
-            </a:solidFill>
-            <a:prstDash val="solid"/>
-          </a:ln>
-        </p:spPr>
       </p:sp>
       <p:sp>
         <p:nvSpPr>
@@ -7297,7 +6457,7 @@
           <a:bodyPr wrap="square" rtlCol="0" anchor="ctr"/>
           <a:lstStyle/>
           <a:p>
-            <a:pPr algn="ctr" indent="0" marL="0">
+            <a:pPr marL="0" indent="0" algn="ctr">
               <a:buNone/>
             </a:pPr>
             <a:r>
@@ -7333,7 +6493,7 @@
           <a:bodyPr wrap="square" rtlCol="0" anchor="ctr"/>
           <a:lstStyle/>
           <a:p>
-            <a:pPr indent="0" marL="0">
+            <a:pPr marL="0" indent="0">
               <a:buNone/>
             </a:pPr>
             <a:r>
@@ -7372,7 +6532,7 @@
           <a:bodyPr wrap="square" rtlCol="0" anchor="ctr"/>
           <a:lstStyle/>
           <a:p>
-            <a:pPr algn="ctr" indent="0" marL="0">
+            <a:pPr marL="0" indent="0" algn="ctr">
               <a:buNone/>
             </a:pPr>
             <a:r>
@@ -7691,4 +6851,265 @@
     </a:ext>
   </a:extLst>
 </a:theme>
+</file>
+
+<file path=ppt/theme/theme2.xml><?xml version="1.0" encoding="utf-8"?>
+<a:theme xmlns:a="http://schemas.openxmlformats.org/drawingml/2006/main" name="Office Theme">
+  <a:themeElements>
+    <a:clrScheme name="Office">
+      <a:dk1>
+        <a:sysClr val="windowText" lastClr="000000"/>
+      </a:dk1>
+      <a:lt1>
+        <a:sysClr val="window" lastClr="FFFFFF"/>
+      </a:lt1>
+      <a:dk2>
+        <a:srgbClr val="44546A"/>
+      </a:dk2>
+      <a:lt2>
+        <a:srgbClr val="E7E6E6"/>
+      </a:lt2>
+      <a:accent1>
+        <a:srgbClr val="5B9BD5"/>
+      </a:accent1>
+      <a:accent2>
+        <a:srgbClr val="ED7D31"/>
+      </a:accent2>
+      <a:accent3>
+        <a:srgbClr val="A5A5A5"/>
+      </a:accent3>
+      <a:accent4>
+        <a:srgbClr val="FFC000"/>
+      </a:accent4>
+      <a:accent5>
+        <a:srgbClr val="4472C4"/>
+      </a:accent5>
+      <a:accent6>
+        <a:srgbClr val="70AD47"/>
+      </a:accent6>
+      <a:hlink>
+        <a:srgbClr val="0563C1"/>
+      </a:hlink>
+      <a:folHlink>
+        <a:srgbClr val="954F72"/>
+      </a:folHlink>
+    </a:clrScheme>
+    <a:fontScheme name="Office">
+      <a:majorFont>
+        <a:latin typeface="Calibri Light" panose="020F0302020204030204"/>
+        <a:ea typeface=""/>
+        <a:cs typeface=""/>
+        <a:font script="Jpan" typeface="游ゴシック Light"/>
+        <a:font script="Hang" typeface="맑은 고딕"/>
+        <a:font script="Hans" typeface="等线 Light"/>
+        <a:font script="Hant" typeface="新細明體"/>
+        <a:font script="Arab" typeface="Times New Roman"/>
+        <a:font script="Hebr" typeface="Times New Roman"/>
+        <a:font script="Thai" typeface="Angsana New"/>
+        <a:font script="Ethi" typeface="Nyala"/>
+        <a:font script="Beng" typeface="Vrinda"/>
+        <a:font script="Gujr" typeface="Shruti"/>
+        <a:font script="Khmr" typeface="MoolBoran"/>
+        <a:font script="Knda" typeface="Tunga"/>
+        <a:font script="Guru" typeface="Raavi"/>
+        <a:font script="Cans" typeface="Euphemia"/>
+        <a:font script="Cher" typeface="Plantagenet Cherokee"/>
+        <a:font script="Yiii" typeface="Microsoft Yi Baiti"/>
+        <a:font script="Tibt" typeface="Microsoft Himalaya"/>
+        <a:font script="Thaa" typeface="MV Boli"/>
+        <a:font script="Deva" typeface="Mangal"/>
+        <a:font script="Telu" typeface="Gautami"/>
+        <a:font script="Taml" typeface="Latha"/>
+        <a:font script="Syrc" typeface="Estrangelo Edessa"/>
+        <a:font script="Orya" typeface="Kalinga"/>
+        <a:font script="Mlym" typeface="Kartika"/>
+        <a:font script="Laoo" typeface="DokChampa"/>
+        <a:font script="Sinh" typeface="Iskoola Pota"/>
+        <a:font script="Mong" typeface="Mongolian Baiti"/>
+        <a:font script="Viet" typeface="Times New Roman"/>
+        <a:font script="Uigh" typeface="Microsoft Uighur"/>
+        <a:font script="Geor" typeface="Sylfaen"/>
+      </a:majorFont>
+      <a:minorFont>
+        <a:latin typeface="Calibri" panose="020F0502020204030204"/>
+        <a:ea typeface=""/>
+        <a:cs typeface=""/>
+        <a:font script="Jpan" typeface="游ゴシック"/>
+        <a:font script="Hang" typeface="맑은 고딕"/>
+        <a:font script="Hans" typeface="等线"/>
+        <a:font script="Hant" typeface="新細明體"/>
+        <a:font script="Arab" typeface="Arial"/>
+        <a:font script="Hebr" typeface="Arial"/>
+        <a:font script="Thai" typeface="Cordia New"/>
+        <a:font script="Ethi" typeface="Nyala"/>
+        <a:font script="Beng" typeface="Vrinda"/>
+        <a:font script="Gujr" typeface="Shruti"/>
+        <a:font script="Khmr" typeface="DaunPenh"/>
+        <a:font script="Knda" typeface="Tunga"/>
+        <a:font script="Guru" typeface="Raavi"/>
+        <a:font script="Cans" typeface="Euphemia"/>
+        <a:font script="Cher" typeface="Plantagenet Cherokee"/>
+        <a:font script="Yiii" typeface="Microsoft Yi Baiti"/>
+        <a:font script="Tibt" typeface="Microsoft Himalaya"/>
+        <a:font script="Thaa" typeface="MV Boli"/>
+        <a:font script="Deva" typeface="Mangal"/>
+        <a:font script="Telu" typeface="Gautami"/>
+        <a:font script="Taml" typeface="Latha"/>
+        <a:font script="Syrc" typeface="Estrangelo Edessa"/>
+        <a:font script="Orya" typeface="Kalinga"/>
+        <a:font script="Mlym" typeface="Kartika"/>
+        <a:font script="Laoo" typeface="DokChampa"/>
+        <a:font script="Sinh" typeface="Iskoola Pota"/>
+        <a:font script="Mong" typeface="Mongolian Baiti"/>
+        <a:font script="Viet" typeface="Arial"/>
+        <a:font script="Uigh" typeface="Microsoft Uighur"/>
+        <a:font script="Geor" typeface="Sylfaen"/>
+      </a:minorFont>
+    </a:fontScheme>
+    <a:fmtScheme name="Office">
+      <a:fillStyleLst>
+        <a:solidFill>
+          <a:schemeClr val="phClr"/>
+        </a:solidFill>
+        <a:gradFill rotWithShape="1">
+          <a:gsLst>
+            <a:gs pos="0">
+              <a:schemeClr val="phClr">
+                <a:lumMod val="110000"/>
+                <a:satMod val="105000"/>
+                <a:tint val="67000"/>
+              </a:schemeClr>
+            </a:gs>
+            <a:gs pos="50000">
+              <a:schemeClr val="phClr">
+                <a:lumMod val="105000"/>
+                <a:satMod val="103000"/>
+                <a:tint val="73000"/>
+              </a:schemeClr>
+            </a:gs>
+            <a:gs pos="100000">
+              <a:schemeClr val="phClr">
+                <a:lumMod val="105000"/>
+                <a:satMod val="109000"/>
+                <a:tint val="81000"/>
+              </a:schemeClr>
+            </a:gs>
+          </a:gsLst>
+          <a:lin ang="5400000" scaled="0"/>
+        </a:gradFill>
+        <a:gradFill rotWithShape="1">
+          <a:gsLst>
+            <a:gs pos="0">
+              <a:schemeClr val="phClr">
+                <a:satMod val="103000"/>
+                <a:lumMod val="102000"/>
+                <a:tint val="94000"/>
+              </a:schemeClr>
+            </a:gs>
+            <a:gs pos="50000">
+              <a:schemeClr val="phClr">
+                <a:satMod val="110000"/>
+                <a:lumMod val="100000"/>
+                <a:shade val="100000"/>
+              </a:schemeClr>
+            </a:gs>
+            <a:gs pos="100000">
+              <a:schemeClr val="phClr">
+                <a:lumMod val="99000"/>
+                <a:satMod val="120000"/>
+                <a:shade val="78000"/>
+              </a:schemeClr>
+            </a:gs>
+          </a:gsLst>
+          <a:lin ang="5400000" scaled="0"/>
+        </a:gradFill>
+      </a:fillStyleLst>
+      <a:lnStyleLst>
+        <a:ln w="6350" cap="flat" cmpd="sng" algn="ctr">
+          <a:solidFill>
+            <a:schemeClr val="phClr"/>
+          </a:solidFill>
+          <a:prstDash val="solid"/>
+          <a:miter lim="800000"/>
+        </a:ln>
+        <a:ln w="12700" cap="flat" cmpd="sng" algn="ctr">
+          <a:solidFill>
+            <a:schemeClr val="phClr"/>
+          </a:solidFill>
+          <a:prstDash val="solid"/>
+          <a:miter lim="800000"/>
+        </a:ln>
+        <a:ln w="19050" cap="flat" cmpd="sng" algn="ctr">
+          <a:solidFill>
+            <a:schemeClr val="phClr"/>
+          </a:solidFill>
+          <a:prstDash val="solid"/>
+          <a:miter lim="800000"/>
+        </a:ln>
+      </a:lnStyleLst>
+      <a:effectStyleLst>
+        <a:effectStyle>
+          <a:effectLst/>
+        </a:effectStyle>
+        <a:effectStyle>
+          <a:effectLst/>
+        </a:effectStyle>
+        <a:effectStyle>
+          <a:effectLst>
+            <a:outerShdw blurRad="57150" dist="19050" dir="5400000" algn="ctr" rotWithShape="0">
+              <a:srgbClr val="000000">
+                <a:alpha val="63000"/>
+              </a:srgbClr>
+            </a:outerShdw>
+          </a:effectLst>
+        </a:effectStyle>
+      </a:effectStyleLst>
+      <a:bgFillStyleLst>
+        <a:solidFill>
+          <a:schemeClr val="phClr"/>
+        </a:solidFill>
+        <a:solidFill>
+          <a:schemeClr val="phClr">
+            <a:tint val="95000"/>
+            <a:satMod val="170000"/>
+          </a:schemeClr>
+        </a:solidFill>
+        <a:gradFill rotWithShape="1">
+          <a:gsLst>
+            <a:gs pos="0">
+              <a:schemeClr val="phClr">
+                <a:tint val="93000"/>
+                <a:satMod val="150000"/>
+                <a:shade val="98000"/>
+                <a:lumMod val="102000"/>
+              </a:schemeClr>
+            </a:gs>
+            <a:gs pos="50000">
+              <a:schemeClr val="phClr">
+                <a:tint val="98000"/>
+                <a:satMod val="130000"/>
+                <a:shade val="90000"/>
+                <a:lumMod val="103000"/>
+              </a:schemeClr>
+            </a:gs>
+            <a:gs pos="100000">
+              <a:schemeClr val="phClr">
+                <a:shade val="63000"/>
+                <a:satMod val="120000"/>
+              </a:schemeClr>
+            </a:gs>
+          </a:gsLst>
+          <a:lin ang="5400000" scaled="0"/>
+        </a:gradFill>
+      </a:bgFillStyleLst>
+    </a:fmtScheme>
+  </a:themeElements>
+  <a:objectDefaults/>
+  <a:extraClrSchemeLst/>
+  <a:extLst>
+    <a:ext uri="{05A4C25C-085E-4340-85A3-A5531E510DB2}">
+      <thm15:themeFamily xmlns:thm15="http://schemas.microsoft.com/office/thememl/2012/main" name="Office Theme" id="{62F939B6-93AF-4DB8-9C6B-D6C7DFDC589F}" vid="{4A3C46E8-61CC-4603-A589-7422A47A8E4A}"/>
+    </a:ext>
+  </a:extLst>
+</a:theme>
 </file>